--- a/projects/Clexane_Interview_Deck_Jan_ppt169_20260615/exports/Clexane_Interview_Deck_Jan.pptx
+++ b/projects/Clexane_Interview_Deck_Jan_ppt169_20260615/exports/Clexane_Interview_Deck_Jan.pptx
@@ -635,7 +635,7 @@
           <a:p>
             <a:r>
               <a:rPr lang="zh-CN" dirty="0"/>
-              <a:t>The ADAPT framework is how I approach every physician call. It's not a script — it's a mindset that keeps the physician's clinical reality at the center.</a:t>
+              <a:t>This slide shows how I structure every physician call — from preparation before I walk in to analysis after I leave.</a:t>
             </a:r>
           </a:p>
           <a:p>
@@ -644,7 +644,7 @@
           <a:p>
             <a:r>
               <a:rPr lang="zh-CN" dirty="0"/>
-              <a:t>A is Assess: before I walk in, I review the physician's specialty, patient mix, and current prescribing behavior. I prepare relevant data rather than walking in cold.</a:t>
+              <a:t>Before the call: Pre-Call Preparation is non-negotiable. I review the physician's specialty, patient caseload, and prescribing patterns. I prepare the one or two clinical data points most relevant to their patients. I know who the gatekeeper is and what time of day to visit. This is what separates a prepared MR from one who shows up and wings it.</a:t>
             </a:r>
           </a:p>
           <a:p>
@@ -653,7 +653,7 @@
           <a:p>
             <a:r>
               <a:rPr lang="zh-CN" dirty="0"/>
-              <a:t>D is Discover: in the call, I ask open questions to surface the physician's actual challenges. "What concerns do you have with your current anticoagulation approach?" I listen much more than I talk at this stage.</a:t>
+              <a:t>In the call, I move through four stages. Opening is about building rapport quickly and setting a clear agenda — "I have 5 minutes of evidence I think is relevant to your cardiac patients. May I share it?" That gets permission and sets expectations.</a:t>
             </a:r>
           </a:p>
           <a:p>
@@ -662,7 +662,7 @@
           <a:p>
             <a:r>
               <a:rPr lang="zh-CN" dirty="0"/>
-              <a:t>A is Activate: once I understand their need, I connect Clexane's evidence to that specific problem. If a cardiologist is worried about monitoring burden in the ICU, I lead with the no-aPTT-monitoring advantage and back it with the ESSENCE data.</a:t>
+              <a:t>Probing is where I spend most of my listening energy. I ask open questions: "What challenges do you face with anticoagulation management in your ward?" I want to understand their specific unmet need before I present anything.</a:t>
             </a:r>
           </a:p>
           <a:p>
@@ -671,7 +671,7 @@
           <a:p>
             <a:r>
               <a:rPr lang="zh-CN" dirty="0"/>
-              <a:t>P is Project: I help the physician visualize the patient outcome. "Your DVT patients can be discharged a day earlier because they can self-administer at home." Making the benefit tangible is what moves prescribing behavior.</a:t>
+              <a:t>Presentation is where I connect Clexane's evidence directly to the need I just uncovered. If they said monitoring is burdensome, I lead with no-aPTT. If they said patients struggle to come back for follow-up, I lead with self-injection and outpatient use.</a:t>
             </a:r>
           </a:p>
           <a:p>
@@ -680,7 +680,7 @@
           <a:p>
             <a:r>
               <a:rPr lang="zh-CN" dirty="0"/>
-              <a:t>T is Tie Down: I always leave with a concrete next step agreed. That might be a trial case, a follow-up appointment, or a commitment to try Clexane on specific patient types.</a:t>
+              <a:t>The key to this slide is the two-way cycle between Probing and Presentation. These are NOT linear stages — they loop. If a physician raises an objection during Presentation, I cycle back to Probing to understand the objection more deeply before responding. If they ask questions, that tells me I need more data in my Presentation. The cycle repeats until the physician's need is fully satisfied.</a:t>
             </a:r>
           </a:p>
           <a:p>
@@ -689,7 +689,25 @@
           <a:p>
             <a:r>
               <a:rPr lang="zh-CN" dirty="0"/>
-              <a:t>I used this approach at Roche — I described a real example of getting a cardiologist at Bhumibol to agree to a Clexane pilot in one call by working through all five steps.</a:t>
+              <a:t>Closing is where I secure a concrete next step — a trial prescription, a follow-up appointment, agreement to present at a department meeting. I always leave with a yes on something.</a:t>
+            </a:r>
+          </a:p>
+          <a:p>
+            <a:endParaRPr lang="zh-CN" dirty="0"/>
+          </a:p>
+          <a:p>
+            <a:r>
+              <a:rPr lang="zh-CN" dirty="0"/>
+              <a:t>After the call: Post-Call Analysis is when I update my CRM notes, identify what went well and what to refine, and plan the next call sequence. Great MRs learn and adjust after every visit.</a:t>
+            </a:r>
+          </a:p>
+          <a:p>
+            <a:endParaRPr lang="zh-CN" dirty="0"/>
+          </a:p>
+          <a:p>
+            <a:r>
+              <a:rPr lang="zh-CN" dirty="0"/>
+              <a:t>Communication Skills — active listening, empathy, reading non-verbal cues — is the invisible thread that runs through every stage. It's what makes the clinical knowledge land with a real physician in a real conversation.</a:t>
             </a:r>
           </a:p>
         </p:txBody>
@@ -24335,7 +24353,7 @@
                 <a:ea typeface="Microsoft YaHei"/>
                 <a:cs typeface="Arial"/>
               </a:rPr>
-              <a:t>04</a:t>
+              <a:t>06</a:t>
             </a:r>
           </a:p>
         </p:txBody>
@@ -24349,7 +24367,7 @@
         <p:spPr>
           <a:xfrm>
             <a:off x="718185" y="208598"/>
-            <a:ext cx="5605774" cy="396240"/>
+            <a:ext cx="5278133" cy="396240"/>
           </a:xfrm>
           <a:prstGeom prst="rect">
             <a:avLst/>
@@ -24375,7 +24393,7 @@
                 <a:ea typeface="Microsoft YaHei"/>
                 <a:cs typeface="Arial"/>
               </a:rPr>
-              <a:t>My Sales Call Approach — ADAPT Framework</a:t>
+              <a:t>My Selling Approach — The Sales Process</a:t>
             </a:r>
           </a:p>
         </p:txBody>
@@ -24389,7 +24407,7 @@
         <p:spPr>
           <a:xfrm>
             <a:off x="730568" y="504349"/>
-            <a:ext cx="3262170" cy="198120"/>
+            <a:ext cx="6213538" cy="198120"/>
           </a:xfrm>
           <a:prstGeom prst="rect">
             <a:avLst/>
@@ -24415,21 +24433,452 @@
                 <a:ea typeface="Microsoft YaHei"/>
                 <a:cs typeface="Arial"/>
               </a:rPr>
-              <a:t>A structured, physician-centered detailing method</a:t>
+              <a:t>Opening · Probing · Presentation · Closing — backed by Pre-Call Preparation and Post-Call Analysis</a:t>
             </a:r>
           </a:p>
         </p:txBody>
       </p:sp>
       <p:sp>
         <p:nvSpPr>
-          <p:cNvPr id="8" name="Polygon 8"/>
+          <p:cNvPr id="8" name="Ellipse 8"/>
           <p:cNvSpPr/>
           <p:nvPr/>
         </p:nvSpPr>
         <p:spPr>
           <a:xfrm>
-            <a:off x="381000" y="1219200"/>
-            <a:ext cx="2057400" cy="762000"/>
+            <a:off x="381000" y="800100"/>
+            <a:ext cx="2895600" cy="647700"/>
+          </a:xfrm>
+          <a:prstGeom prst="ellipse">
+            <a:avLst/>
+          </a:prstGeom>
+          <a:solidFill>
+            <a:srgbClr val="FFD700"/>
+          </a:solidFill>
+          <a:ln>
+            <a:noFill/>
+          </a:ln>
+        </p:spPr>
+      </p:sp>
+      <p:sp>
+        <p:nvSpPr>
+          <p:cNvPr id="9" name="TextBox 9"/>
+          <p:cNvSpPr txBox="1"/>
+          <p:nvPr/>
+        </p:nvSpPr>
+        <p:spPr>
+          <a:xfrm>
+            <a:off x="1528779" y="962978"/>
+            <a:ext cx="600042" cy="213360"/>
+          </a:xfrm>
+          <a:prstGeom prst="rect">
+            <a:avLst/>
+          </a:prstGeom>
+          <a:noFill/>
+          <a:ln>
+            <a:noFill/>
+          </a:ln>
+        </p:spPr>
+        <p:txBody>
+          <a:bodyPr wrap="none" lIns="0" tIns="0" rIns="0" bIns="0" anchor="t" anchorCtr="0">
+            <a:spAutoFit/>
+          </a:bodyPr>
+          <a:lstStyle/>
+          <a:p>
+            <a:pPr algn="ctr"/>
+            <a:r>
+              <a:rPr lang="zh-CN" sz="1050" b="1" dirty="0">
+                <a:solidFill>
+                  <a:srgbClr val="5A3A00"/>
+                </a:solidFill>
+                <a:latin typeface="Arial"/>
+                <a:ea typeface="Microsoft YaHei"/>
+                <a:cs typeface="Arial"/>
+              </a:rPr>
+              <a:t>Pre-Call</a:t>
+            </a:r>
+          </a:p>
+        </p:txBody>
+      </p:sp>
+      <p:sp>
+        <p:nvSpPr>
+          <p:cNvPr id="10" name="TextBox 10"/>
+          <p:cNvSpPr txBox="1"/>
+          <p:nvPr/>
+        </p:nvSpPr>
+        <p:spPr>
+          <a:xfrm>
+            <a:off x="1469326" y="1169670"/>
+            <a:ext cx="718947" cy="182880"/>
+          </a:xfrm>
+          <a:prstGeom prst="rect">
+            <a:avLst/>
+          </a:prstGeom>
+          <a:noFill/>
+          <a:ln>
+            <a:noFill/>
+          </a:ln>
+        </p:spPr>
+        <p:txBody>
+          <a:bodyPr wrap="none" lIns="0" tIns="0" rIns="0" bIns="0" anchor="t" anchorCtr="0">
+            <a:spAutoFit/>
+          </a:bodyPr>
+          <a:lstStyle/>
+          <a:p>
+            <a:pPr algn="ctr"/>
+            <a:r>
+              <a:rPr lang="zh-CN" sz="900" dirty="0">
+                <a:solidFill>
+                  <a:srgbClr val="5A3A00"/>
+                </a:solidFill>
+                <a:latin typeface="Arial"/>
+                <a:ea typeface="Microsoft YaHei"/>
+                <a:cs typeface="Arial"/>
+              </a:rPr>
+              <a:t>Preparation</a:t>
+            </a:r>
+          </a:p>
+        </p:txBody>
+      </p:sp>
+      <p:sp>
+        <p:nvSpPr>
+          <p:cNvPr id="11" name="Line 11"/>
+          <p:cNvSpPr/>
+          <p:nvPr/>
+        </p:nvSpPr>
+        <p:spPr>
+          <a:xfrm>
+            <a:off x="3276600" y="1123950"/>
+            <a:ext cx="1685925" cy="142875"/>
+          </a:xfrm>
+          <a:prstGeom prst="line">
+            <a:avLst/>
+          </a:prstGeom>
+          <a:noFill/>
+          <a:ln w="17145">
+            <a:solidFill>
+              <a:srgbClr val="8B6900"/>
+            </a:solidFill>
+            <a:custDash>
+              <a:ds d="277777" sp="166666"/>
+            </a:custDash>
+            <a:tailEnd type="triangle" w="lg" len="lg"/>
+          </a:ln>
+        </p:spPr>
+      </p:sp>
+      <p:sp>
+        <p:nvSpPr>
+          <p:cNvPr id="12" name="Rectangle 12"/>
+          <p:cNvSpPr/>
+          <p:nvPr/>
+        </p:nvSpPr>
+        <p:spPr>
+          <a:xfrm>
+            <a:off x="5000625" y="990600"/>
+            <a:ext cx="2190750" cy="571500"/>
+          </a:xfrm>
+          <a:prstGeom prst="roundRect">
+            <a:avLst>
+              <a:gd name="adj" fmla="val 13333"/>
+            </a:avLst>
+          </a:prstGeom>
+          <a:solidFill>
+            <a:srgbClr val="AE232F"/>
+          </a:solidFill>
+          <a:ln>
+            <a:noFill/>
+          </a:ln>
+          <a:effectLst>
+            <a:outerShdw blurRad="76200" dist="19050" dir="5400000" algn="ctr" rotWithShape="0">
+              <a:srgbClr val="000000">
+                <a:alpha val="5250"/>
+              </a:srgbClr>
+            </a:outerShdw>
+          </a:effectLst>
+        </p:spPr>
+      </p:sp>
+      <p:grpSp>
+        <p:nvGrpSpPr>
+          <p:cNvPr id="15" name="Group 15"/>
+          <p:cNvGrpSpPr/>
+          <p:nvPr/>
+        </p:nvGrpSpPr>
+        <p:grpSpPr>
+          <a:xfrm>
+            <a:off x="5187156" y="1150938"/>
+            <a:ext cx="122237" cy="174624"/>
+            <a:chOff x="5187156" y="1150938"/>
+            <a:chExt cx="122237" cy="174624"/>
+          </a:xfrm>
+        </p:grpSpPr>
+        <p:sp>
+          <p:nvSpPr>
+            <p:cNvPr id="13" name="Freeform 13"/>
+            <p:cNvSpPr/>
+            <p:nvPr/>
+          </p:nvSpPr>
+          <p:spPr>
+            <a:xfrm>
+              <a:off x="5204619" y="1150938"/>
+              <a:ext cx="87313" cy="87313"/>
+            </a:xfrm>
+            <a:custGeom>
+              <a:avLst/>
+              <a:gdLst/>
+              <a:ahLst/>
+              <a:cxnLst/>
+              <a:rect l="l" t="t" r="r" b="b"/>
+              <a:pathLst>
+                <a:path w="87313" h="87313">
+                  <a:moveTo>
+                    <a:pt x="43656" y="0"/>
+                  </a:moveTo>
+                  <a:cubicBezTo>
+                    <a:pt x="67767" y="0"/>
+                    <a:pt x="87313" y="19546"/>
+                    <a:pt x="87313" y="43656"/>
+                  </a:cubicBezTo>
+                  <a:cubicBezTo>
+                    <a:pt x="87313" y="67767"/>
+                    <a:pt x="67767" y="87313"/>
+                    <a:pt x="43656" y="87313"/>
+                  </a:cubicBezTo>
+                  <a:cubicBezTo>
+                    <a:pt x="19546" y="87313"/>
+                    <a:pt x="0" y="67767"/>
+                    <a:pt x="0" y="43656"/>
+                  </a:cubicBezTo>
+                  <a:lnTo>
+                    <a:pt x="44" y="41762"/>
+                  </a:lnTo>
+                  <a:cubicBezTo>
+                    <a:pt x="1058" y="18411"/>
+                    <a:pt x="20283" y="1"/>
+                    <a:pt x="43656" y="0"/>
+                  </a:cubicBezTo>
+                  <a:close/>
+                </a:path>
+              </a:pathLst>
+            </a:custGeom>
+            <a:solidFill>
+              <a:srgbClr val="FFFFFF"/>
+            </a:solidFill>
+            <a:ln>
+              <a:noFill/>
+            </a:ln>
+          </p:spPr>
+        </p:sp>
+        <p:sp>
+          <p:nvSpPr>
+            <p:cNvPr id="14" name="Freeform 14"/>
+            <p:cNvSpPr/>
+            <p:nvPr/>
+          </p:nvSpPr>
+          <p:spPr>
+            <a:xfrm>
+              <a:off x="5187156" y="1255712"/>
+              <a:ext cx="122237" cy="69850"/>
+            </a:xfrm>
+            <a:custGeom>
+              <a:avLst/>
+              <a:gdLst/>
+              <a:ahLst/>
+              <a:cxnLst/>
+              <a:rect l="l" t="t" r="r" b="b"/>
+              <a:pathLst>
+                <a:path w="122237" h="69850">
+                  <a:moveTo>
+                    <a:pt x="78581" y="0"/>
+                  </a:moveTo>
+                  <a:cubicBezTo>
+                    <a:pt x="102692" y="0"/>
+                    <a:pt x="122237" y="19546"/>
+                    <a:pt x="122237" y="43656"/>
+                  </a:cubicBezTo>
+                  <a:lnTo>
+                    <a:pt x="122237" y="52388"/>
+                  </a:lnTo>
+                  <a:cubicBezTo>
+                    <a:pt x="122237" y="62032"/>
+                    <a:pt x="114419" y="69850"/>
+                    <a:pt x="104775" y="69850"/>
+                  </a:cubicBezTo>
+                  <a:lnTo>
+                    <a:pt x="17462" y="69850"/>
+                  </a:lnTo>
+                  <a:cubicBezTo>
+                    <a:pt x="7818" y="69850"/>
+                    <a:pt x="0" y="62032"/>
+                    <a:pt x="0" y="52388"/>
+                  </a:cubicBezTo>
+                  <a:lnTo>
+                    <a:pt x="0" y="43656"/>
+                  </a:lnTo>
+                  <a:cubicBezTo>
+                    <a:pt x="0" y="19546"/>
+                    <a:pt x="19546" y="0"/>
+                    <a:pt x="43656" y="0"/>
+                  </a:cubicBezTo>
+                  <a:lnTo>
+                    <a:pt x="78581" y="0"/>
+                  </a:lnTo>
+                  <a:close/>
+                </a:path>
+              </a:pathLst>
+            </a:custGeom>
+            <a:solidFill>
+              <a:srgbClr val="FFFFFF"/>
+            </a:solidFill>
+            <a:ln>
+              <a:noFill/>
+            </a:ln>
+          </p:spPr>
+        </p:sp>
+      </p:grpSp>
+      <p:sp>
+        <p:nvSpPr>
+          <p:cNvPr id="16" name="TextBox 16"/>
+          <p:cNvSpPr txBox="1"/>
+          <p:nvPr/>
+        </p:nvSpPr>
+        <p:spPr>
+          <a:xfrm>
+            <a:off x="5915775" y="1097756"/>
+            <a:ext cx="627150" cy="228600"/>
+          </a:xfrm>
+          <a:prstGeom prst="rect">
+            <a:avLst/>
+          </a:prstGeom>
+          <a:noFill/>
+          <a:ln>
+            <a:noFill/>
+          </a:ln>
+        </p:spPr>
+        <p:txBody>
+          <a:bodyPr wrap="none" lIns="0" tIns="0" rIns="0" bIns="0" anchor="t" anchorCtr="0">
+            <a:spAutoFit/>
+          </a:bodyPr>
+          <a:lstStyle/>
+          <a:p>
+            <a:pPr algn="ctr"/>
+            <a:r>
+              <a:rPr lang="zh-CN" sz="1125" b="1" dirty="0">
+                <a:solidFill>
+                  <a:srgbClr val="FFFFFF"/>
+                </a:solidFill>
+                <a:latin typeface="Arial"/>
+                <a:ea typeface="Microsoft YaHei"/>
+                <a:cs typeface="Arial"/>
+              </a:rPr>
+              <a:t>Opening</a:t>
+            </a:r>
+          </a:p>
+        </p:txBody>
+      </p:sp>
+      <p:sp>
+        <p:nvSpPr>
+          <p:cNvPr id="17" name="TextBox 17"/>
+          <p:cNvSpPr txBox="1"/>
+          <p:nvPr/>
+        </p:nvSpPr>
+        <p:spPr>
+          <a:xfrm>
+            <a:off x="5041725" y="1320641"/>
+            <a:ext cx="2375249" cy="167640"/>
+          </a:xfrm>
+          <a:prstGeom prst="rect">
+            <a:avLst/>
+          </a:prstGeom>
+          <a:noFill/>
+          <a:ln>
+            <a:noFill/>
+          </a:ln>
+        </p:spPr>
+        <p:txBody>
+          <a:bodyPr wrap="none" lIns="0" tIns="0" rIns="0" bIns="0" anchor="t" anchorCtr="0">
+            <a:spAutoFit/>
+          </a:bodyPr>
+          <a:lstStyle/>
+          <a:p>
+            <a:pPr algn="ctr"/>
+            <a:r>
+              <a:rPr lang="zh-CN" sz="825" dirty="0">
+                <a:solidFill>
+                  <a:srgbClr val="F9E5E7"/>
+                </a:solidFill>
+                <a:latin typeface="Arial"/>
+                <a:ea typeface="Microsoft YaHei"/>
+                <a:cs typeface="Arial"/>
+              </a:rPr>
+              <a:t>Build rapport · Set agenda · Gain permission</a:t>
+            </a:r>
+          </a:p>
+        </p:txBody>
+      </p:sp>
+      <p:sp>
+        <p:nvSpPr>
+          <p:cNvPr id="18" name="Line 18"/>
+          <p:cNvSpPr/>
+          <p:nvPr/>
+        </p:nvSpPr>
+        <p:spPr>
+          <a:xfrm>
+            <a:off x="6096000" y="1562100"/>
+            <a:ext cx="1" cy="266700"/>
+          </a:xfrm>
+          <a:prstGeom prst="line">
+            <a:avLst/>
+          </a:prstGeom>
+          <a:noFill/>
+          <a:ln w="23812">
+            <a:solidFill>
+              <a:srgbClr val="AE232F"/>
+            </a:solidFill>
+            <a:tailEnd type="triangle" w="lg" len="lg"/>
+          </a:ln>
+        </p:spPr>
+      </p:sp>
+      <p:sp>
+        <p:nvSpPr>
+          <p:cNvPr id="19" name="Rectangle 19"/>
+          <p:cNvSpPr/>
+          <p:nvPr/>
+        </p:nvSpPr>
+        <p:spPr>
+          <a:xfrm>
+            <a:off x="5000625" y="1847850"/>
+            <a:ext cx="2190750" cy="685800"/>
+          </a:xfrm>
+          <a:prstGeom prst="roundRect">
+            <a:avLst>
+              <a:gd name="adj" fmla="val 11111"/>
+            </a:avLst>
+          </a:prstGeom>
+          <a:solidFill>
+            <a:srgbClr val="AE232F"/>
+          </a:solidFill>
+          <a:ln>
+            <a:noFill/>
+          </a:ln>
+          <a:effectLst>
+            <a:outerShdw blurRad="76200" dist="19050" dir="5400000" algn="ctr" rotWithShape="0">
+              <a:srgbClr val="000000">
+                <a:alpha val="5250"/>
+              </a:srgbClr>
+            </a:outerShdw>
+          </a:effectLst>
+        </p:spPr>
+      </p:sp>
+      <p:sp>
+        <p:nvSpPr>
+          <p:cNvPr id="20" name="Freeform 20"/>
+          <p:cNvSpPr/>
+          <p:nvPr/>
+        </p:nvSpPr>
+        <p:spPr>
+          <a:xfrm>
+            <a:off x="5154008" y="2028567"/>
+            <a:ext cx="182330" cy="183572"/>
           </a:xfrm>
           <a:custGeom>
             <a:avLst/>
@@ -24438,96 +24887,50 @@
             <a:cxnLst/>
             <a:rect l="l" t="t" r="r" b="b"/>
             <a:pathLst>
-              <a:path w="2057400" h="762000">
+              <a:path w="182330" h="183572">
                 <a:moveTo>
-                  <a:pt x="0" y="0"/>
-                </a:moveTo>
-                <a:lnTo>
-                  <a:pt x="1828800" y="0"/>
-                </a:lnTo>
-                <a:lnTo>
-                  <a:pt x="2057400" y="381000"/>
-                </a:lnTo>
-                <a:lnTo>
-                  <a:pt x="1828800" y="762000"/>
-                </a:lnTo>
-                <a:lnTo>
-                  <a:pt x="0" y="762000"/>
-                </a:lnTo>
-                <a:close/>
-              </a:path>
-            </a:pathLst>
-          </a:custGeom>
-          <a:solidFill>
-            <a:srgbClr val="AE232F"/>
-          </a:solidFill>
-          <a:ln>
-            <a:noFill/>
-          </a:ln>
-        </p:spPr>
-      </p:sp>
-      <p:sp>
-        <p:nvSpPr>
-          <p:cNvPr id="9" name="Freeform 9"/>
-          <p:cNvSpPr/>
-          <p:nvPr/>
-        </p:nvSpPr>
-        <p:spPr>
-          <a:xfrm>
-            <a:off x="659163" y="1429334"/>
-            <a:ext cx="198906" cy="200260"/>
-          </a:xfrm>
-          <a:custGeom>
-            <a:avLst/>
-            <a:gdLst/>
-            <a:ahLst/>
-            <a:cxnLst/>
-            <a:rect l="l" t="t" r="r" b="b"/>
-            <a:pathLst>
-              <a:path w="198906" h="200260">
-                <a:moveTo>
-                  <a:pt x="121887" y="19152"/>
+                  <a:pt x="111730" y="17556"/>
                 </a:moveTo>
                 <a:cubicBezTo>
-                  <a:pt x="140957" y="30160"/>
-                  <a:pt x="154332" y="48879"/>
-                  <a:pt x="158568" y="70486"/>
+                  <a:pt x="129210" y="27646"/>
+                  <a:pt x="141471" y="44805"/>
+                  <a:pt x="145354" y="64612"/>
                 </a:cubicBezTo>
                 <a:cubicBezTo>
-                  <a:pt x="162804" y="92094"/>
-                  <a:pt x="157487" y="114477"/>
-                  <a:pt x="143985" y="131871"/>
+                  <a:pt x="149237" y="84419"/>
+                  <a:pt x="144363" y="104937"/>
+                  <a:pt x="131986" y="120881"/>
                 </a:cubicBezTo>
                 <a:lnTo>
-                  <a:pt x="195296" y="183182"/>
+                  <a:pt x="179021" y="167917"/>
                 </a:lnTo>
                 <a:cubicBezTo>
-                  <a:pt x="198906" y="186919"/>
-                  <a:pt x="198854" y="192860"/>
-                  <a:pt x="195180" y="196534"/>
+                  <a:pt x="182330" y="171343"/>
+                  <a:pt x="182283" y="176788"/>
+                  <a:pt x="178915" y="180156"/>
                 </a:cubicBezTo>
                 <a:cubicBezTo>
-                  <a:pt x="191506" y="200208"/>
-                  <a:pt x="185565" y="200260"/>
-                  <a:pt x="181828" y="196650"/>
+                  <a:pt x="175547" y="183524"/>
+                  <a:pt x="170101" y="183572"/>
+                  <a:pt x="166675" y="180263"/>
                 </a:cubicBezTo>
                 <a:lnTo>
-                  <a:pt x="130507" y="145339"/>
+                  <a:pt x="119631" y="133227"/>
                 </a:lnTo>
                 <a:cubicBezTo>
-                  <a:pt x="100255" y="168813"/>
-                  <a:pt x="57282" y="166191"/>
-                  <a:pt x="30108" y="139214"/>
+                  <a:pt x="91901" y="154745"/>
+                  <a:pt x="52508" y="152342"/>
+                  <a:pt x="27599" y="127613"/>
                 </a:cubicBezTo>
                 <a:cubicBezTo>
-                  <a:pt x="2934" y="112237"/>
-                  <a:pt x="0" y="69284"/>
-                  <a:pt x="23253" y="38862"/>
+                  <a:pt x="2689" y="102884"/>
+                  <a:pt x="0" y="63510"/>
+                  <a:pt x="21315" y="35624"/>
                 </a:cubicBezTo>
                 <a:cubicBezTo>
-                  <a:pt x="46507" y="8441"/>
-                  <a:pt x="88724" y="0"/>
-                  <a:pt x="121887" y="19142"/>
+                  <a:pt x="42631" y="7737"/>
+                  <a:pt x="81330" y="0"/>
+                  <a:pt x="111730" y="17547"/>
                 </a:cubicBezTo>
               </a:path>
             </a:pathLst>
@@ -24542,14 +24945,14 @@
       </p:sp>
       <p:sp>
         <p:nvSpPr>
-          <p:cNvPr id="10" name="TextBox 10"/>
+          <p:cNvPr id="21" name="TextBox 21"/>
           <p:cNvSpPr txBox="1"/>
           <p:nvPr/>
         </p:nvSpPr>
         <p:spPr>
           <a:xfrm>
-            <a:off x="1409093" y="1343025"/>
-            <a:ext cx="153614" cy="304800"/>
+            <a:off x="5931527" y="2031206"/>
+            <a:ext cx="595646" cy="228600"/>
           </a:xfrm>
           <a:prstGeom prst="rect">
             <a:avLst/>
@@ -24567,7 +24970,7 @@
           <a:p>
             <a:pPr algn="ctr"/>
             <a:r>
-              <a:rPr lang="zh-CN" sz="1500" b="1" dirty="0">
+              <a:rPr lang="zh-CN" sz="1125" b="1" dirty="0">
                 <a:solidFill>
                   <a:srgbClr val="FFFFFF"/>
                 </a:solidFill>
@@ -24575,21 +24978,21 @@
                 <a:ea typeface="Microsoft YaHei"/>
                 <a:cs typeface="Arial"/>
               </a:rPr>
-              <a:t>A</a:t>
+              <a:t>Probing</a:t>
             </a:r>
           </a:p>
         </p:txBody>
       </p:sp>
       <p:sp>
         <p:nvSpPr>
-          <p:cNvPr id="11" name="TextBox 11"/>
+          <p:cNvPr id="22" name="TextBox 22"/>
           <p:cNvSpPr txBox="1"/>
           <p:nvPr/>
         </p:nvSpPr>
         <p:spPr>
           <a:xfrm>
-            <a:off x="1248264" y="1571149"/>
-            <a:ext cx="475271" cy="198120"/>
+            <a:off x="5091232" y="2235041"/>
+            <a:ext cx="2276237" cy="167640"/>
           </a:xfrm>
           <a:prstGeom prst="rect">
             <a:avLst/>
@@ -24607,47 +25010,7 @@
           <a:p>
             <a:pPr algn="ctr"/>
             <a:r>
-              <a:rPr lang="zh-CN" sz="975" b="1" dirty="0">
-                <a:solidFill>
-                  <a:srgbClr val="FFFFFF"/>
-                </a:solidFill>
-                <a:latin typeface="Arial"/>
-                <a:ea typeface="Microsoft YaHei"/>
-                <a:cs typeface="Arial"/>
-              </a:rPr>
-              <a:t>ASSESS</a:t>
-            </a:r>
-          </a:p>
-        </p:txBody>
-      </p:sp>
-      <p:sp>
-        <p:nvSpPr>
-          <p:cNvPr id="12" name="TextBox 12"/>
-          <p:cNvSpPr txBox="1"/>
-          <p:nvPr/>
-        </p:nvSpPr>
-        <p:spPr>
-          <a:xfrm>
-            <a:off x="1101328" y="1766888"/>
-            <a:ext cx="769144" cy="152400"/>
-          </a:xfrm>
-          <a:prstGeom prst="rect">
-            <a:avLst/>
-          </a:prstGeom>
-          <a:noFill/>
-          <a:ln>
-            <a:noFill/>
-          </a:ln>
-        </p:spPr>
-        <p:txBody>
-          <a:bodyPr wrap="none" lIns="0" tIns="0" rIns="0" bIns="0" anchor="t" anchorCtr="0">
-            <a:spAutoFit/>
-          </a:bodyPr>
-          <a:lstStyle/>
-          <a:p>
-            <a:pPr algn="ctr"/>
-            <a:r>
-              <a:rPr lang="zh-CN" sz="750" dirty="0">
+              <a:rPr lang="zh-CN" sz="825" dirty="0">
                 <a:solidFill>
                   <a:srgbClr val="F9E5E7"/>
                 </a:solidFill>
@@ -24655,192 +25018,21 @@
                 <a:ea typeface="Microsoft YaHei"/>
                 <a:cs typeface="Arial"/>
               </a:rPr>
-              <a:t>Physician needs</a:t>
+              <a:t>Open questions · Discover physician needs</a:t>
             </a:r>
           </a:p>
         </p:txBody>
       </p:sp>
       <p:sp>
         <p:nvSpPr>
-          <p:cNvPr id="13" name="Polygon 13"/>
-          <p:cNvSpPr/>
-          <p:nvPr/>
-        </p:nvSpPr>
-        <p:spPr>
-          <a:xfrm>
-            <a:off x="2362200" y="1219200"/>
-            <a:ext cx="2057400" cy="762000"/>
-          </a:xfrm>
-          <a:custGeom>
-            <a:avLst/>
-            <a:gdLst/>
-            <a:ahLst/>
-            <a:cxnLst/>
-            <a:rect l="l" t="t" r="r" b="b"/>
-            <a:pathLst>
-              <a:path w="2057400" h="762000">
-                <a:moveTo>
-                  <a:pt x="0" y="0"/>
-                </a:moveTo>
-                <a:lnTo>
-                  <a:pt x="1828800" y="0"/>
-                </a:lnTo>
-                <a:lnTo>
-                  <a:pt x="2057400" y="381000"/>
-                </a:lnTo>
-                <a:lnTo>
-                  <a:pt x="1828800" y="762000"/>
-                </a:lnTo>
-                <a:lnTo>
-                  <a:pt x="0" y="762000"/>
-                </a:lnTo>
-                <a:close/>
-              </a:path>
-            </a:pathLst>
-          </a:custGeom>
-          <a:solidFill>
-            <a:srgbClr val="AE232F">
-              <a:alpha val="85000"/>
-            </a:srgbClr>
-          </a:solidFill>
-          <a:ln>
-            <a:noFill/>
-          </a:ln>
-        </p:spPr>
-      </p:sp>
-      <p:sp>
-        <p:nvSpPr>
-          <p:cNvPr id="14" name="Freeform 14"/>
-          <p:cNvSpPr/>
-          <p:nvPr/>
-        </p:nvSpPr>
-        <p:spPr>
-          <a:xfrm>
-            <a:off x="2523710" y="1457325"/>
-            <a:ext cx="209955" cy="152400"/>
-          </a:xfrm>
-          <a:custGeom>
-            <a:avLst/>
-            <a:gdLst/>
-            <a:ahLst/>
-            <a:cxnLst/>
-            <a:rect l="l" t="t" r="r" b="b"/>
-            <a:pathLst>
-              <a:path w="209955" h="152400">
-                <a:moveTo>
-                  <a:pt x="105190" y="0"/>
-                </a:moveTo>
-                <a:cubicBezTo>
-                  <a:pt x="146052" y="0"/>
-                  <a:pt x="180085" y="23136"/>
-                  <a:pt x="206774" y="68142"/>
-                </a:cubicBezTo>
-                <a:lnTo>
-                  <a:pt x="208870" y="71752"/>
-                </a:lnTo>
-                <a:lnTo>
-                  <a:pt x="209298" y="72704"/>
-                </a:lnTo>
-                <a:lnTo>
-                  <a:pt x="209584" y="73495"/>
-                </a:lnTo>
-                <a:lnTo>
-                  <a:pt x="209717" y="74019"/>
-                </a:lnTo>
-                <a:lnTo>
-                  <a:pt x="209851" y="74800"/>
-                </a:lnTo>
-                <a:lnTo>
-                  <a:pt x="209955" y="75752"/>
-                </a:lnTo>
-                <a:lnTo>
-                  <a:pt x="209955" y="76800"/>
-                </a:lnTo>
-                <a:lnTo>
-                  <a:pt x="209822" y="77857"/>
-                </a:lnTo>
-                <a:cubicBezTo>
-                  <a:pt x="209760" y="78211"/>
-                  <a:pt x="209677" y="78561"/>
-                  <a:pt x="209574" y="78905"/>
-                </a:cubicBezTo>
-                <a:lnTo>
-                  <a:pt x="209203" y="79934"/>
-                </a:lnTo>
-                <a:lnTo>
-                  <a:pt x="208860" y="80648"/>
-                </a:lnTo>
-                <a:lnTo>
-                  <a:pt x="208708" y="80934"/>
-                </a:lnTo>
-                <a:cubicBezTo>
-                  <a:pt x="182381" y="126997"/>
-                  <a:pt x="148700" y="151228"/>
-                  <a:pt x="108171" y="152362"/>
-                </a:cubicBezTo>
-                <a:lnTo>
-                  <a:pt x="105190" y="152400"/>
-                </a:lnTo>
-                <a:cubicBezTo>
-                  <a:pt x="63318" y="152400"/>
-                  <a:pt x="28638" y="128121"/>
-                  <a:pt x="1672" y="80924"/>
-                </a:cubicBezTo>
-                <a:cubicBezTo>
-                  <a:pt x="0" y="77997"/>
-                  <a:pt x="0" y="74403"/>
-                  <a:pt x="1672" y="71476"/>
-                </a:cubicBezTo>
-                <a:cubicBezTo>
-                  <a:pt x="28638" y="24279"/>
-                  <a:pt x="63318" y="0"/>
-                  <a:pt x="105190" y="0"/>
-                </a:cubicBezTo>
-                <a:close/>
-                <a:moveTo>
-                  <a:pt x="105190" y="47625"/>
-                </a:moveTo>
-                <a:cubicBezTo>
-                  <a:pt x="89408" y="47625"/>
-                  <a:pt x="76615" y="60418"/>
-                  <a:pt x="76615" y="76200"/>
-                </a:cubicBezTo>
-                <a:cubicBezTo>
-                  <a:pt x="76615" y="91982"/>
-                  <a:pt x="89408" y="104775"/>
-                  <a:pt x="105190" y="104775"/>
-                </a:cubicBezTo>
-                <a:cubicBezTo>
-                  <a:pt x="120972" y="104775"/>
-                  <a:pt x="133765" y="91982"/>
-                  <a:pt x="133765" y="76200"/>
-                </a:cubicBezTo>
-                <a:cubicBezTo>
-                  <a:pt x="133765" y="60418"/>
-                  <a:pt x="120972" y="47625"/>
-                  <a:pt x="105190" y="47625"/>
-                </a:cubicBezTo>
-              </a:path>
-            </a:pathLst>
-          </a:custGeom>
-          <a:solidFill>
-            <a:srgbClr val="FFFFFF"/>
-          </a:solidFill>
-          <a:ln>
-            <a:noFill/>
-          </a:ln>
-        </p:spPr>
-      </p:sp>
-      <p:sp>
-        <p:nvSpPr>
-          <p:cNvPr id="15" name="TextBox 15"/>
+          <p:cNvPr id="23" name="TextBox 23"/>
           <p:cNvSpPr txBox="1"/>
           <p:nvPr/>
         </p:nvSpPr>
         <p:spPr>
           <a:xfrm>
-            <a:off x="3314093" y="1343025"/>
-            <a:ext cx="153614" cy="304800"/>
+            <a:off x="5121485" y="2387441"/>
+            <a:ext cx="2215729" cy="167640"/>
           </a:xfrm>
           <a:prstGeom prst="rect">
             <a:avLst/>
@@ -24858,87 +25050,7 @@
           <a:p>
             <a:pPr algn="ctr"/>
             <a:r>
-              <a:rPr lang="zh-CN" sz="1500" b="1" dirty="0">
-                <a:solidFill>
-                  <a:srgbClr val="FFFFFF"/>
-                </a:solidFill>
-                <a:latin typeface="Arial"/>
-                <a:ea typeface="Microsoft YaHei"/>
-                <a:cs typeface="Arial"/>
-              </a:rPr>
-              <a:t>D</a:t>
-            </a:r>
-          </a:p>
-        </p:txBody>
-      </p:sp>
-      <p:sp>
-        <p:nvSpPr>
-          <p:cNvPr id="16" name="TextBox 16"/>
-          <p:cNvSpPr txBox="1"/>
-          <p:nvPr/>
-        </p:nvSpPr>
-        <p:spPr>
-          <a:xfrm>
-            <a:off x="3081593" y="1571149"/>
-            <a:ext cx="618614" cy="198120"/>
-          </a:xfrm>
-          <a:prstGeom prst="rect">
-            <a:avLst/>
-          </a:prstGeom>
-          <a:noFill/>
-          <a:ln>
-            <a:noFill/>
-          </a:ln>
-        </p:spPr>
-        <p:txBody>
-          <a:bodyPr wrap="none" lIns="0" tIns="0" rIns="0" bIns="0" anchor="t" anchorCtr="0">
-            <a:spAutoFit/>
-          </a:bodyPr>
-          <a:lstStyle/>
-          <a:p>
-            <a:pPr algn="ctr"/>
-            <a:r>
-              <a:rPr lang="zh-CN" sz="975" b="1" dirty="0">
-                <a:solidFill>
-                  <a:srgbClr val="FFFFFF"/>
-                </a:solidFill>
-                <a:latin typeface="Arial"/>
-                <a:ea typeface="Microsoft YaHei"/>
-                <a:cs typeface="Arial"/>
-              </a:rPr>
-              <a:t>DISCOVER</a:t>
-            </a:r>
-          </a:p>
-        </p:txBody>
-      </p:sp>
-      <p:sp>
-        <p:nvSpPr>
-          <p:cNvPr id="17" name="TextBox 17"/>
-          <p:cNvSpPr txBox="1"/>
-          <p:nvPr/>
-        </p:nvSpPr>
-        <p:spPr>
-          <a:xfrm>
-            <a:off x="2936319" y="1766888"/>
-            <a:ext cx="909161" cy="152400"/>
-          </a:xfrm>
-          <a:prstGeom prst="rect">
-            <a:avLst/>
-          </a:prstGeom>
-          <a:noFill/>
-          <a:ln>
-            <a:noFill/>
-          </a:ln>
-        </p:spPr>
-        <p:txBody>
-          <a:bodyPr wrap="none" lIns="0" tIns="0" rIns="0" bIns="0" anchor="t" anchorCtr="0">
-            <a:spAutoFit/>
-          </a:bodyPr>
-          <a:lstStyle/>
-          <a:p>
-            <a:pPr algn="ctr"/>
-            <a:r>
-              <a:rPr lang="zh-CN" sz="750" dirty="0">
+              <a:rPr lang="zh-CN" sz="825" dirty="0">
                 <a:solidFill>
                   <a:srgbClr val="F9E5E7"/>
                 </a:solidFill>
@@ -24946,21 +25058,21 @@
                 <a:ea typeface="Microsoft YaHei"/>
                 <a:cs typeface="Arial"/>
               </a:rPr>
-              <a:t>Patient challenges</a:t>
+              <a:t>Understand current prescribing behavior</a:t>
             </a:r>
           </a:p>
         </p:txBody>
       </p:sp>
       <p:sp>
         <p:nvSpPr>
-          <p:cNvPr id="18" name="Polygon 18"/>
+          <p:cNvPr id="24" name="Freeform 24"/>
           <p:cNvSpPr/>
           <p:nvPr/>
         </p:nvSpPr>
         <p:spPr>
           <a:xfrm>
-            <a:off x="4343400" y="1219200"/>
-            <a:ext cx="2057400" cy="762000"/>
+            <a:off x="4457700" y="2457450"/>
+            <a:ext cx="542925" cy="647700"/>
           </a:xfrm>
           <a:custGeom>
             <a:avLst/>
@@ -24969,46 +25081,37 @@
             <a:cxnLst/>
             <a:rect l="l" t="t" r="r" b="b"/>
             <a:pathLst>
-              <a:path w="2057400" h="762000">
+              <a:path w="542925" h="647700">
                 <a:moveTo>
+                  <a:pt x="542925" y="0"/>
+                </a:moveTo>
+                <a:cubicBezTo>
                   <a:pt x="0" y="0"/>
-                </a:moveTo>
-                <a:lnTo>
-                  <a:pt x="1828800" y="0"/>
-                </a:lnTo>
-                <a:lnTo>
-                  <a:pt x="2057400" y="381000"/>
-                </a:lnTo>
-                <a:lnTo>
-                  <a:pt x="1828800" y="762000"/>
-                </a:lnTo>
-                <a:lnTo>
-                  <a:pt x="0" y="762000"/>
-                </a:lnTo>
-                <a:close/>
+                  <a:pt x="0" y="647700"/>
+                  <a:pt x="542925" y="647700"/>
+                </a:cubicBezTo>
               </a:path>
             </a:pathLst>
           </a:custGeom>
-          <a:solidFill>
-            <a:srgbClr val="AE232F">
-              <a:alpha val="70000"/>
-            </a:srgbClr>
-          </a:solidFill>
-          <a:ln>
-            <a:noFill/>
-          </a:ln>
-        </p:spPr>
-      </p:sp>
-      <p:sp>
-        <p:nvSpPr>
-          <p:cNvPr id="19" name="Freeform 19"/>
+          <a:noFill/>
+          <a:ln w="20955">
+            <a:solidFill>
+              <a:srgbClr val="AE232F"/>
+            </a:solidFill>
+            <a:tailEnd type="triangle" w="lg" len="lg"/>
+          </a:ln>
+        </p:spPr>
+      </p:sp>
+      <p:sp>
+        <p:nvSpPr>
+          <p:cNvPr id="25" name="Freeform 25"/>
           <p:cNvSpPr/>
           <p:nvPr/>
         </p:nvSpPr>
         <p:spPr>
           <a:xfrm>
-            <a:off x="4517591" y="1438275"/>
-            <a:ext cx="185019" cy="190500"/>
+            <a:off x="7191375" y="2457450"/>
+            <a:ext cx="542925" cy="647700"/>
           </a:xfrm>
           <a:custGeom>
             <a:avLst/>
@@ -25017,141 +25120,248 @@
             <a:cxnLst/>
             <a:rect l="l" t="t" r="r" b="b"/>
             <a:pathLst>
-              <a:path w="185019" h="190500">
+              <a:path w="542925" h="647700">
                 <a:moveTo>
-                  <a:pt x="82984" y="0"/>
+                  <a:pt x="0" y="647700"/>
+                </a:moveTo>
+                <a:cubicBezTo>
+                  <a:pt x="542925" y="647700"/>
+                  <a:pt x="542925" y="0"/>
+                  <a:pt x="0" y="0"/>
+                </a:cubicBezTo>
+              </a:path>
+            </a:pathLst>
+          </a:custGeom>
+          <a:noFill/>
+          <a:ln w="20955">
+            <a:solidFill>
+              <a:srgbClr val="AE232F"/>
+            </a:solidFill>
+            <a:tailEnd type="triangle" w="lg" len="lg"/>
+          </a:ln>
+        </p:spPr>
+      </p:sp>
+      <p:sp>
+        <p:nvSpPr>
+          <p:cNvPr id="26" name="TextBox 26"/>
+          <p:cNvSpPr txBox="1"/>
+          <p:nvPr/>
+        </p:nvSpPr>
+        <p:spPr>
+          <a:xfrm>
+            <a:off x="4114455" y="2679859"/>
+            <a:ext cx="381691" cy="137160"/>
+          </a:xfrm>
+          <a:prstGeom prst="rect">
+            <a:avLst/>
+          </a:prstGeom>
+          <a:noFill/>
+          <a:ln>
+            <a:noFill/>
+          </a:ln>
+        </p:spPr>
+        <p:txBody>
+          <a:bodyPr wrap="none" lIns="0" tIns="0" rIns="0" bIns="0" anchor="t" anchorCtr="0">
+            <a:spAutoFit/>
+          </a:bodyPr>
+          <a:lstStyle/>
+          <a:p>
+            <a:pPr algn="ctr"/>
+            <a:r>
+              <a:rPr lang="zh-CN" sz="675" i="1" dirty="0">
+                <a:solidFill>
+                  <a:srgbClr val="AE232F"/>
+                </a:solidFill>
+                <a:latin typeface="Arial"/>
+                <a:ea typeface="Microsoft YaHei"/>
+                <a:cs typeface="Arial"/>
+              </a:rPr>
+              <a:t>forward</a:t>
+            </a:r>
+          </a:p>
+        </p:txBody>
+      </p:sp>
+      <p:sp>
+        <p:nvSpPr>
+          <p:cNvPr id="27" name="TextBox 27"/>
+          <p:cNvSpPr txBox="1"/>
+          <p:nvPr/>
+        </p:nvSpPr>
+        <p:spPr>
+          <a:xfrm>
+            <a:off x="7779115" y="2679859"/>
+            <a:ext cx="215170" cy="137160"/>
+          </a:xfrm>
+          <a:prstGeom prst="rect">
+            <a:avLst/>
+          </a:prstGeom>
+          <a:noFill/>
+          <a:ln>
+            <a:noFill/>
+          </a:ln>
+        </p:spPr>
+        <p:txBody>
+          <a:bodyPr wrap="none" lIns="0" tIns="0" rIns="0" bIns="0" anchor="t" anchorCtr="0">
+            <a:spAutoFit/>
+          </a:bodyPr>
+          <a:lstStyle/>
+          <a:p>
+            <a:pPr algn="ctr"/>
+            <a:r>
+              <a:rPr lang="zh-CN" sz="675" i="1" dirty="0">
+                <a:solidFill>
+                  <a:srgbClr val="AE232F"/>
+                </a:solidFill>
+                <a:latin typeface="Arial"/>
+                <a:ea typeface="Microsoft YaHei"/>
+                <a:cs typeface="Arial"/>
+              </a:rPr>
+              <a:t>back</a:t>
+            </a:r>
+          </a:p>
+        </p:txBody>
+      </p:sp>
+      <p:sp>
+        <p:nvSpPr>
+          <p:cNvPr id="28" name="Rectangle 28"/>
+          <p:cNvSpPr/>
+          <p:nvPr/>
+        </p:nvSpPr>
+        <p:spPr>
+          <a:xfrm>
+            <a:off x="5000625" y="3105150"/>
+            <a:ext cx="2190750" cy="685800"/>
+          </a:xfrm>
+          <a:prstGeom prst="roundRect">
+            <a:avLst>
+              <a:gd name="adj" fmla="val 11111"/>
+            </a:avLst>
+          </a:prstGeom>
+          <a:solidFill>
+            <a:srgbClr val="AE232F"/>
+          </a:solidFill>
+          <a:ln>
+            <a:noFill/>
+          </a:ln>
+          <a:effectLst>
+            <a:outerShdw blurRad="76200" dist="19050" dir="5400000" algn="ctr" rotWithShape="0">
+              <a:srgbClr val="000000">
+                <a:alpha val="5250"/>
+              </a:srgbClr>
+            </a:outerShdw>
+          </a:effectLst>
+        </p:spPr>
+      </p:sp>
+      <p:sp>
+        <p:nvSpPr>
+          <p:cNvPr id="29" name="Freeform 29"/>
+          <p:cNvSpPr/>
+          <p:nvPr/>
+        </p:nvSpPr>
+        <p:spPr>
+          <a:xfrm>
+            <a:off x="5185919" y="3294062"/>
+            <a:ext cx="124430" cy="174625"/>
+          </a:xfrm>
+          <a:custGeom>
+            <a:avLst/>
+            <a:gdLst/>
+            <a:ahLst/>
+            <a:cxnLst/>
+            <a:rect l="l" t="t" r="r" b="b"/>
+            <a:pathLst>
+              <a:path w="124430" h="174625">
+                <a:moveTo>
+                  <a:pt x="88549" y="0"/>
+                </a:moveTo>
+                <a:cubicBezTo>
+                  <a:pt x="93371" y="0"/>
+                  <a:pt x="97281" y="3909"/>
+                  <a:pt x="97281" y="8731"/>
+                </a:cubicBezTo>
+                <a:cubicBezTo>
+                  <a:pt x="97281" y="13553"/>
+                  <a:pt x="93371" y="17463"/>
+                  <a:pt x="88549" y="17463"/>
+                </a:cubicBezTo>
+                <a:lnTo>
+                  <a:pt x="88549" y="59600"/>
+                </a:lnTo>
+                <a:lnTo>
+                  <a:pt x="122881" y="154019"/>
+                </a:lnTo>
+                <a:lnTo>
+                  <a:pt x="123177" y="154692"/>
+                </a:lnTo>
+                <a:cubicBezTo>
+                  <a:pt x="124430" y="158052"/>
+                  <a:pt x="124424" y="161752"/>
+                  <a:pt x="123160" y="165108"/>
+                </a:cubicBezTo>
+                <a:lnTo>
+                  <a:pt x="122549" y="166522"/>
+                </a:lnTo>
+                <a:cubicBezTo>
+                  <a:pt x="120463" y="170689"/>
+                  <a:pt x="116541" y="173635"/>
+                  <a:pt x="111958" y="174477"/>
+                </a:cubicBezTo>
+                <a:lnTo>
+                  <a:pt x="110377" y="174625"/>
+                </a:lnTo>
+                <a:lnTo>
+                  <a:pt x="14334" y="174625"/>
+                </a:lnTo>
+                <a:lnTo>
+                  <a:pt x="12753" y="174477"/>
+                </a:lnTo>
+                <a:cubicBezTo>
+                  <a:pt x="8437" y="173682"/>
+                  <a:pt x="4694" y="171018"/>
+                  <a:pt x="2529" y="167201"/>
+                </a:cubicBezTo>
+                <a:cubicBezTo>
+                  <a:pt x="365" y="163383"/>
+                  <a:pt x="0" y="158803"/>
+                  <a:pt x="1534" y="154692"/>
+                </a:cubicBezTo>
+                <a:lnTo>
+                  <a:pt x="1874" y="153906"/>
+                </a:lnTo>
+                <a:lnTo>
+                  <a:pt x="36162" y="59573"/>
+                </a:lnTo>
+                <a:lnTo>
+                  <a:pt x="36162" y="17463"/>
+                </a:lnTo>
+                <a:cubicBezTo>
+                  <a:pt x="31340" y="17463"/>
+                  <a:pt x="27431" y="13553"/>
+                  <a:pt x="27431" y="8731"/>
+                </a:cubicBezTo>
+                <a:cubicBezTo>
+                  <a:pt x="27431" y="3909"/>
+                  <a:pt x="31340" y="0"/>
+                  <a:pt x="36162" y="0"/>
+                </a:cubicBezTo>
+                <a:lnTo>
+                  <a:pt x="88549" y="0"/>
+                </a:lnTo>
+                <a:close/>
+                <a:moveTo>
+                  <a:pt x="71087" y="17463"/>
                 </a:moveTo>
                 <a:lnTo>
-                  <a:pt x="81556" y="48"/>
-                </a:lnTo>
-                <a:cubicBezTo>
-                  <a:pt x="71614" y="795"/>
-                  <a:pt x="63931" y="9081"/>
-                  <a:pt x="63934" y="19050"/>
-                </a:cubicBezTo>
-                <a:lnTo>
-                  <a:pt x="63934" y="45749"/>
+                  <a:pt x="53624" y="17463"/>
                 </a:lnTo>
                 <a:lnTo>
-                  <a:pt x="40808" y="32404"/>
-                </a:lnTo>
-                <a:cubicBezTo>
-                  <a:pt x="31696" y="27144"/>
-                  <a:pt x="20046" y="30265"/>
-                  <a:pt x="14785" y="39376"/>
-                </a:cubicBezTo>
-                <a:lnTo>
-                  <a:pt x="5260" y="55874"/>
+                  <a:pt x="53624" y="52388"/>
                 </a:lnTo>
                 <a:lnTo>
-                  <a:pt x="4565" y="57188"/>
-                </a:lnTo>
-                <a:cubicBezTo>
-                  <a:pt x="279" y="66163"/>
-                  <a:pt x="3619" y="76924"/>
-                  <a:pt x="12233" y="81896"/>
-                </a:cubicBezTo>
-                <a:lnTo>
-                  <a:pt x="35350" y="95250"/>
+                  <a:pt x="71087" y="52388"/>
                 </a:lnTo>
                 <a:lnTo>
-                  <a:pt x="12233" y="108604"/>
-                </a:lnTo>
-                <a:cubicBezTo>
-                  <a:pt x="3122" y="113865"/>
-                  <a:pt x="0" y="125515"/>
-                  <a:pt x="5260" y="134626"/>
-                </a:cubicBezTo>
-                <a:lnTo>
-                  <a:pt x="14785" y="151124"/>
-                </a:lnTo>
-                <a:lnTo>
-                  <a:pt x="15576" y="152381"/>
-                </a:lnTo>
-                <a:cubicBezTo>
-                  <a:pt x="21205" y="160580"/>
-                  <a:pt x="32195" y="163070"/>
-                  <a:pt x="40808" y="158096"/>
-                </a:cubicBezTo>
-                <a:lnTo>
-                  <a:pt x="63934" y="144742"/>
-                </a:lnTo>
-                <a:lnTo>
-                  <a:pt x="63934" y="171450"/>
-                </a:lnTo>
-                <a:cubicBezTo>
-                  <a:pt x="63934" y="181971"/>
-                  <a:pt x="72463" y="190500"/>
-                  <a:pt x="82984" y="190500"/>
-                </a:cubicBezTo>
-                <a:lnTo>
-                  <a:pt x="102034" y="190500"/>
-                </a:lnTo>
-                <a:lnTo>
-                  <a:pt x="103463" y="190452"/>
-                </a:lnTo>
-                <a:cubicBezTo>
-                  <a:pt x="113404" y="189705"/>
-                  <a:pt x="121087" y="181419"/>
-                  <a:pt x="121084" y="171450"/>
-                </a:cubicBezTo>
-                <a:lnTo>
-                  <a:pt x="121084" y="144742"/>
-                </a:lnTo>
-                <a:lnTo>
-                  <a:pt x="144211" y="158105"/>
-                </a:lnTo>
-                <a:cubicBezTo>
-                  <a:pt x="153322" y="163366"/>
-                  <a:pt x="164973" y="160244"/>
-                  <a:pt x="170233" y="151133"/>
-                </a:cubicBezTo>
-                <a:lnTo>
-                  <a:pt x="179758" y="134636"/>
-                </a:lnTo>
-                <a:lnTo>
-                  <a:pt x="180454" y="133321"/>
-                </a:lnTo>
-                <a:cubicBezTo>
-                  <a:pt x="184739" y="124347"/>
-                  <a:pt x="181400" y="113585"/>
-                  <a:pt x="172786" y="108614"/>
-                </a:cubicBezTo>
-                <a:lnTo>
-                  <a:pt x="149659" y="95250"/>
-                </a:lnTo>
-                <a:lnTo>
-                  <a:pt x="172786" y="81896"/>
-                </a:lnTo>
-                <a:cubicBezTo>
-                  <a:pt x="181897" y="76635"/>
-                  <a:pt x="185019" y="64985"/>
-                  <a:pt x="179758" y="55874"/>
-                </a:cubicBezTo>
-                <a:lnTo>
-                  <a:pt x="170233" y="39376"/>
-                </a:lnTo>
-                <a:lnTo>
-                  <a:pt x="169443" y="38119"/>
-                </a:lnTo>
-                <a:cubicBezTo>
-                  <a:pt x="163814" y="29920"/>
-                  <a:pt x="152824" y="27430"/>
-                  <a:pt x="144211" y="32404"/>
-                </a:cubicBezTo>
-                <a:lnTo>
-                  <a:pt x="121084" y="45739"/>
-                </a:lnTo>
-                <a:lnTo>
-                  <a:pt x="121084" y="19050"/>
-                </a:lnTo>
-                <a:cubicBezTo>
-                  <a:pt x="121084" y="8529"/>
-                  <a:pt x="112555" y="0"/>
-                  <a:pt x="102034" y="0"/>
-                </a:cubicBezTo>
-                <a:lnTo>
-                  <a:pt x="82984" y="0"/>
+                  <a:pt x="71087" y="17463"/>
                 </a:lnTo>
                 <a:close/>
               </a:path>
@@ -25167,14 +25377,14 @@
       </p:sp>
       <p:sp>
         <p:nvSpPr>
-          <p:cNvPr id="20" name="TextBox 20"/>
+          <p:cNvPr id="30" name="TextBox 30"/>
           <p:cNvSpPr txBox="1"/>
           <p:nvPr/>
         </p:nvSpPr>
         <p:spPr>
           <a:xfrm>
-            <a:off x="5295293" y="1343025"/>
-            <a:ext cx="153614" cy="304800"/>
+            <a:off x="5714937" y="3288506"/>
+            <a:ext cx="1028825" cy="228600"/>
           </a:xfrm>
           <a:prstGeom prst="rect">
             <a:avLst/>
@@ -25192,7 +25402,7 @@
           <a:p>
             <a:pPr algn="ctr"/>
             <a:r>
-              <a:rPr lang="zh-CN" sz="1500" b="1" dirty="0">
+              <a:rPr lang="zh-CN" sz="1125" b="1" dirty="0">
                 <a:solidFill>
                   <a:srgbClr val="FFFFFF"/>
                 </a:solidFill>
@@ -25200,21 +25410,21 @@
                 <a:ea typeface="Microsoft YaHei"/>
                 <a:cs typeface="Arial"/>
               </a:rPr>
-              <a:t>A</a:t>
+              <a:t>Presentation</a:t>
             </a:r>
           </a:p>
         </p:txBody>
       </p:sp>
       <p:sp>
         <p:nvSpPr>
-          <p:cNvPr id="21" name="TextBox 21"/>
+          <p:cNvPr id="31" name="TextBox 31"/>
           <p:cNvSpPr txBox="1"/>
           <p:nvPr/>
         </p:nvSpPr>
         <p:spPr>
           <a:xfrm>
-            <a:off x="5076445" y="1571149"/>
-            <a:ext cx="591311" cy="198120"/>
+            <a:off x="5058227" y="3492341"/>
+            <a:ext cx="2342245" cy="167640"/>
           </a:xfrm>
           <a:prstGeom prst="rect">
             <a:avLst/>
@@ -25232,7 +25442,265 @@
           <a:p>
             <a:pPr algn="ctr"/>
             <a:r>
-              <a:rPr lang="zh-CN" sz="975" b="1" dirty="0">
+              <a:rPr lang="zh-CN" sz="825" dirty="0">
+                <a:solidFill>
+                  <a:srgbClr val="F9E5E7"/>
+                </a:solidFill>
+                <a:latin typeface="Arial"/>
+                <a:ea typeface="Microsoft YaHei"/>
+                <a:cs typeface="Arial"/>
+              </a:rPr>
+              <a:t>Evidence-based detailing · Feature-Benefit</a:t>
+            </a:r>
+          </a:p>
+        </p:txBody>
+      </p:sp>
+      <p:sp>
+        <p:nvSpPr>
+          <p:cNvPr id="32" name="TextBox 32"/>
+          <p:cNvSpPr txBox="1"/>
+          <p:nvPr/>
+        </p:nvSpPr>
+        <p:spPr>
+          <a:xfrm>
+            <a:off x="5179243" y="3644741"/>
+            <a:ext cx="2100215" cy="167640"/>
+          </a:xfrm>
+          <a:prstGeom prst="rect">
+            <a:avLst/>
+          </a:prstGeom>
+          <a:noFill/>
+          <a:ln>
+            <a:noFill/>
+          </a:ln>
+        </p:spPr>
+        <p:txBody>
+          <a:bodyPr wrap="none" lIns="0" tIns="0" rIns="0" bIns="0" anchor="t" anchorCtr="0">
+            <a:spAutoFit/>
+          </a:bodyPr>
+          <a:lstStyle/>
+          <a:p>
+            <a:pPr algn="ctr"/>
+            <a:r>
+              <a:rPr lang="zh-CN" sz="825" dirty="0">
+                <a:solidFill>
+                  <a:srgbClr val="F9E5E7"/>
+                </a:solidFill>
+                <a:latin typeface="Arial"/>
+                <a:ea typeface="Microsoft YaHei"/>
+                <a:cs typeface="Arial"/>
+              </a:rPr>
+              <a:t>Clinical data matched to physician need</a:t>
+            </a:r>
+          </a:p>
+        </p:txBody>
+      </p:sp>
+      <p:sp>
+        <p:nvSpPr>
+          <p:cNvPr id="33" name="Line 33"/>
+          <p:cNvSpPr/>
+          <p:nvPr/>
+        </p:nvSpPr>
+        <p:spPr>
+          <a:xfrm>
+            <a:off x="6096000" y="3790950"/>
+            <a:ext cx="1" cy="247650"/>
+          </a:xfrm>
+          <a:prstGeom prst="line">
+            <a:avLst/>
+          </a:prstGeom>
+          <a:noFill/>
+          <a:ln w="23812">
+            <a:solidFill>
+              <a:srgbClr val="AE232F"/>
+            </a:solidFill>
+            <a:tailEnd type="triangle" w="lg" len="lg"/>
+          </a:ln>
+        </p:spPr>
+      </p:sp>
+      <p:sp>
+        <p:nvSpPr>
+          <p:cNvPr id="34" name="Rectangle 34"/>
+          <p:cNvSpPr/>
+          <p:nvPr/>
+        </p:nvSpPr>
+        <p:spPr>
+          <a:xfrm>
+            <a:off x="5000625" y="4057650"/>
+            <a:ext cx="2190750" cy="571500"/>
+          </a:xfrm>
+          <a:prstGeom prst="roundRect">
+            <a:avLst>
+              <a:gd name="adj" fmla="val 13333"/>
+            </a:avLst>
+          </a:prstGeom>
+          <a:solidFill>
+            <a:srgbClr val="AE232F"/>
+          </a:solidFill>
+          <a:ln>
+            <a:noFill/>
+          </a:ln>
+          <a:effectLst>
+            <a:outerShdw blurRad="76200" dist="19050" dir="5400000" algn="ctr" rotWithShape="0">
+              <a:srgbClr val="000000">
+                <a:alpha val="5250"/>
+              </a:srgbClr>
+            </a:outerShdw>
+          </a:effectLst>
+        </p:spPr>
+      </p:sp>
+      <p:sp>
+        <p:nvSpPr>
+          <p:cNvPr id="35" name="Freeform 35"/>
+          <p:cNvSpPr/>
+          <p:nvPr/>
+        </p:nvSpPr>
+        <p:spPr>
+          <a:xfrm>
+            <a:off x="5160962" y="4214076"/>
+            <a:ext cx="183618" cy="183919"/>
+          </a:xfrm>
+          <a:custGeom>
+            <a:avLst/>
+            <a:gdLst/>
+            <a:ahLst/>
+            <a:cxnLst/>
+            <a:rect l="l" t="t" r="r" b="b"/>
+            <a:pathLst>
+              <a:path w="183618" h="183919">
+                <a:moveTo>
+                  <a:pt x="130969" y="15611"/>
+                </a:moveTo>
+                <a:cubicBezTo>
+                  <a:pt x="167355" y="36620"/>
+                  <a:pt x="183618" y="80566"/>
+                  <a:pt x="169674" y="120201"/>
+                </a:cubicBezTo>
+                <a:cubicBezTo>
+                  <a:pt x="155730" y="159836"/>
+                  <a:pt x="115534" y="183919"/>
+                  <a:pt x="74008" y="177518"/>
+                </a:cubicBezTo>
+                <a:cubicBezTo>
+                  <a:pt x="32482" y="171117"/>
+                  <a:pt x="1405" y="136047"/>
+                  <a:pt x="44" y="94052"/>
+                </a:cubicBezTo>
+                <a:lnTo>
+                  <a:pt x="0" y="91224"/>
+                </a:lnTo>
+                <a:lnTo>
+                  <a:pt x="44" y="88395"/>
+                </a:lnTo>
+                <a:cubicBezTo>
+                  <a:pt x="1038" y="57722"/>
+                  <a:pt x="18063" y="29823"/>
+                  <a:pt x="44886" y="14911"/>
+                </a:cubicBezTo>
+                <a:cubicBezTo>
+                  <a:pt x="71709" y="0"/>
+                  <a:pt x="104392" y="266"/>
+                  <a:pt x="130969" y="15611"/>
+                </a:cubicBezTo>
+                <a:close/>
+                <a:moveTo>
+                  <a:pt x="119679" y="67588"/>
+                </a:moveTo>
+                <a:cubicBezTo>
+                  <a:pt x="116569" y="64478"/>
+                  <a:pt x="111630" y="64167"/>
+                  <a:pt x="108154" y="66863"/>
+                </a:cubicBezTo>
+                <a:lnTo>
+                  <a:pt x="107333" y="67588"/>
+                </a:lnTo>
+                <a:lnTo>
+                  <a:pt x="78581" y="96331"/>
+                </a:lnTo>
+                <a:lnTo>
+                  <a:pt x="67292" y="85051"/>
+                </a:lnTo>
+                <a:lnTo>
+                  <a:pt x="66471" y="84326"/>
+                </a:lnTo>
+                <a:cubicBezTo>
+                  <a:pt x="62995" y="81632"/>
+                  <a:pt x="58058" y="81943"/>
+                  <a:pt x="54948" y="85053"/>
+                </a:cubicBezTo>
+                <a:cubicBezTo>
+                  <a:pt x="51838" y="88163"/>
+                  <a:pt x="51527" y="93100"/>
+                  <a:pt x="54221" y="96576"/>
+                </a:cubicBezTo>
+                <a:lnTo>
+                  <a:pt x="54946" y="97397"/>
+                </a:lnTo>
+                <a:lnTo>
+                  <a:pt x="72408" y="114859"/>
+                </a:lnTo>
+                <a:lnTo>
+                  <a:pt x="73229" y="115584"/>
+                </a:lnTo>
+                <a:cubicBezTo>
+                  <a:pt x="76379" y="118028"/>
+                  <a:pt x="80784" y="118028"/>
+                  <a:pt x="83934" y="115584"/>
+                </a:cubicBezTo>
+                <a:lnTo>
+                  <a:pt x="84754" y="114859"/>
+                </a:lnTo>
+                <a:lnTo>
+                  <a:pt x="119679" y="79934"/>
+                </a:lnTo>
+                <a:lnTo>
+                  <a:pt x="120404" y="79113"/>
+                </a:lnTo>
+                <a:cubicBezTo>
+                  <a:pt x="123100" y="75638"/>
+                  <a:pt x="122790" y="70699"/>
+                  <a:pt x="119679" y="67588"/>
+                </a:cubicBezTo>
+                <a:close/>
+              </a:path>
+            </a:pathLst>
+          </a:custGeom>
+          <a:solidFill>
+            <a:srgbClr val="FFFFFF"/>
+          </a:solidFill>
+          <a:ln>
+            <a:noFill/>
+          </a:ln>
+        </p:spPr>
+      </p:sp>
+      <p:sp>
+        <p:nvSpPr>
+          <p:cNvPr id="36" name="TextBox 36"/>
+          <p:cNvSpPr txBox="1"/>
+          <p:nvPr/>
+        </p:nvSpPr>
+        <p:spPr>
+          <a:xfrm>
+            <a:off x="5951217" y="4212431"/>
+            <a:ext cx="556266" cy="228600"/>
+          </a:xfrm>
+          <a:prstGeom prst="rect">
+            <a:avLst/>
+          </a:prstGeom>
+          <a:noFill/>
+          <a:ln>
+            <a:noFill/>
+          </a:ln>
+        </p:spPr>
+        <p:txBody>
+          <a:bodyPr wrap="none" lIns="0" tIns="0" rIns="0" bIns="0" anchor="t" anchorCtr="0">
+            <a:spAutoFit/>
+          </a:bodyPr>
+          <a:lstStyle/>
+          <a:p>
+            <a:pPr algn="ctr"/>
+            <a:r>
+              <a:rPr lang="zh-CN" sz="1125" b="1" dirty="0">
                 <a:solidFill>
                   <a:srgbClr val="FFFFFF"/>
                 </a:solidFill>
@@ -25240,21 +25708,21 @@
                 <a:ea typeface="Microsoft YaHei"/>
                 <a:cs typeface="Arial"/>
               </a:rPr>
-              <a:t>ACTIVATE</a:t>
+              <a:t>Closing</a:t>
             </a:r>
           </a:p>
         </p:txBody>
       </p:sp>
       <p:sp>
         <p:nvSpPr>
-          <p:cNvPr id="22" name="TextBox 22"/>
+          <p:cNvPr id="37" name="TextBox 37"/>
           <p:cNvSpPr txBox="1"/>
           <p:nvPr/>
         </p:nvSpPr>
         <p:spPr>
           <a:xfrm>
-            <a:off x="4947523" y="1766888"/>
-            <a:ext cx="849154" cy="152400"/>
+            <a:off x="5165491" y="4416266"/>
+            <a:ext cx="2127718" cy="167640"/>
           </a:xfrm>
           <a:prstGeom prst="rect">
             <a:avLst/>
@@ -25272,7 +25740,7 @@
           <a:p>
             <a:pPr algn="ctr"/>
             <a:r>
-              <a:rPr lang="zh-CN" sz="750" dirty="0">
+              <a:rPr lang="zh-CN" sz="825" dirty="0">
                 <a:solidFill>
                   <a:srgbClr val="F9E5E7"/>
                 </a:solidFill>
@@ -25280,21 +25748,718 @@
                 <a:ea typeface="Microsoft YaHei"/>
                 <a:cs typeface="Arial"/>
               </a:rPr>
-              <a:t>Present evidence</a:t>
+              <a:t>Tie down commitment · Agree next step</a:t>
             </a:r>
           </a:p>
         </p:txBody>
       </p:sp>
       <p:sp>
         <p:nvSpPr>
-          <p:cNvPr id="23" name="Polygon 23"/>
+          <p:cNvPr id="38" name="Ellipse 38"/>
           <p:cNvSpPr/>
           <p:nvPr/>
         </p:nvSpPr>
         <p:spPr>
           <a:xfrm>
-            <a:off x="6324600" y="1219200"/>
+            <a:off x="638175" y="2647950"/>
             <a:ext cx="2057400" cy="762000"/>
+          </a:xfrm>
+          <a:prstGeom prst="ellipse">
+            <a:avLst/>
+          </a:prstGeom>
+          <a:solidFill>
+            <a:srgbClr val="CCCCCC"/>
+          </a:solidFill>
+          <a:ln>
+            <a:noFill/>
+          </a:ln>
+        </p:spPr>
+      </p:sp>
+      <p:sp>
+        <p:nvSpPr>
+          <p:cNvPr id="39" name="Ellipse 39"/>
+          <p:cNvSpPr/>
+          <p:nvPr/>
+        </p:nvSpPr>
+        <p:spPr>
+          <a:xfrm>
+            <a:off x="733425" y="2533650"/>
+            <a:ext cx="571500" cy="571500"/>
+          </a:xfrm>
+          <a:prstGeom prst="ellipse">
+            <a:avLst/>
+          </a:prstGeom>
+          <a:solidFill>
+            <a:srgbClr val="CCCCCC"/>
+          </a:solidFill>
+          <a:ln>
+            <a:noFill/>
+          </a:ln>
+        </p:spPr>
+      </p:sp>
+      <p:sp>
+        <p:nvSpPr>
+          <p:cNvPr id="40" name="Ellipse 40"/>
+          <p:cNvSpPr/>
+          <p:nvPr/>
+        </p:nvSpPr>
+        <p:spPr>
+          <a:xfrm>
+            <a:off x="1104900" y="2324100"/>
+            <a:ext cx="647700" cy="647700"/>
+          </a:xfrm>
+          <a:prstGeom prst="ellipse">
+            <a:avLst/>
+          </a:prstGeom>
+          <a:solidFill>
+            <a:srgbClr val="CCCCCC"/>
+          </a:solidFill>
+          <a:ln>
+            <a:noFill/>
+          </a:ln>
+        </p:spPr>
+      </p:sp>
+      <p:sp>
+        <p:nvSpPr>
+          <p:cNvPr id="41" name="Ellipse 41"/>
+          <p:cNvSpPr/>
+          <p:nvPr/>
+        </p:nvSpPr>
+        <p:spPr>
+          <a:xfrm>
+            <a:off x="1638300" y="2333625"/>
+            <a:ext cx="571500" cy="571500"/>
+          </a:xfrm>
+          <a:prstGeom prst="ellipse">
+            <a:avLst/>
+          </a:prstGeom>
+          <a:solidFill>
+            <a:srgbClr val="CCCCCC"/>
+          </a:solidFill>
+          <a:ln>
+            <a:noFill/>
+          </a:ln>
+        </p:spPr>
+      </p:sp>
+      <p:sp>
+        <p:nvSpPr>
+          <p:cNvPr id="42" name="Ellipse 42"/>
+          <p:cNvSpPr/>
+          <p:nvPr/>
+        </p:nvSpPr>
+        <p:spPr>
+          <a:xfrm>
+            <a:off x="2095500" y="2486025"/>
+            <a:ext cx="495300" cy="495300"/>
+          </a:xfrm>
+          <a:prstGeom prst="ellipse">
+            <a:avLst/>
+          </a:prstGeom>
+          <a:solidFill>
+            <a:srgbClr val="CCCCCC"/>
+          </a:solidFill>
+          <a:ln>
+            <a:noFill/>
+          </a:ln>
+        </p:spPr>
+      </p:sp>
+      <p:sp>
+        <p:nvSpPr>
+          <p:cNvPr id="43" name="TextBox 43"/>
+          <p:cNvSpPr txBox="1"/>
+          <p:nvPr/>
+        </p:nvSpPr>
+        <p:spPr>
+          <a:xfrm>
+            <a:off x="1271292" y="2734628"/>
+            <a:ext cx="791166" cy="213360"/>
+          </a:xfrm>
+          <a:prstGeom prst="rect">
+            <a:avLst/>
+          </a:prstGeom>
+          <a:noFill/>
+          <a:ln>
+            <a:noFill/>
+          </a:ln>
+        </p:spPr>
+        <p:txBody>
+          <a:bodyPr wrap="none" lIns="0" tIns="0" rIns="0" bIns="0" anchor="t" anchorCtr="0">
+            <a:spAutoFit/>
+          </a:bodyPr>
+          <a:lstStyle/>
+          <a:p>
+            <a:pPr algn="ctr"/>
+            <a:r>
+              <a:rPr lang="zh-CN" sz="1050" b="1" dirty="0">
+                <a:solidFill>
+                  <a:srgbClr val="333333"/>
+                </a:solidFill>
+                <a:latin typeface="Arial"/>
+                <a:ea typeface="Microsoft YaHei"/>
+                <a:cs typeface="Arial"/>
+              </a:rPr>
+              <a:t>Objections</a:t>
+            </a:r>
+          </a:p>
+        </p:txBody>
+      </p:sp>
+      <p:sp>
+        <p:nvSpPr>
+          <p:cNvPr id="44" name="TextBox 44"/>
+          <p:cNvSpPr txBox="1"/>
+          <p:nvPr/>
+        </p:nvSpPr>
+        <p:spPr>
+          <a:xfrm>
+            <a:off x="1199793" y="2928938"/>
+            <a:ext cx="934164" cy="152400"/>
+          </a:xfrm>
+          <a:prstGeom prst="rect">
+            <a:avLst/>
+          </a:prstGeom>
+          <a:noFill/>
+          <a:ln>
+            <a:noFill/>
+          </a:ln>
+        </p:spPr>
+        <p:txBody>
+          <a:bodyPr wrap="none" lIns="0" tIns="0" rIns="0" bIns="0" anchor="t" anchorCtr="0">
+            <a:spAutoFit/>
+          </a:bodyPr>
+          <a:lstStyle/>
+          <a:p>
+            <a:pPr algn="ctr"/>
+            <a:r>
+              <a:rPr lang="zh-CN" sz="750" dirty="0">
+                <a:solidFill>
+                  <a:srgbClr val="555555"/>
+                </a:solidFill>
+                <a:latin typeface="Arial"/>
+                <a:ea typeface="Microsoft YaHei"/>
+                <a:cs typeface="Arial"/>
+              </a:rPr>
+              <a:t>Physician pushback</a:t>
+            </a:r>
+          </a:p>
+        </p:txBody>
+      </p:sp>
+      <p:sp>
+        <p:nvSpPr>
+          <p:cNvPr id="45" name="TextBox 45"/>
+          <p:cNvSpPr txBox="1"/>
+          <p:nvPr/>
+        </p:nvSpPr>
+        <p:spPr>
+          <a:xfrm>
+            <a:off x="1307306" y="3062288"/>
+            <a:ext cx="719138" cy="152400"/>
+          </a:xfrm>
+          <a:prstGeom prst="rect">
+            <a:avLst/>
+          </a:prstGeom>
+          <a:noFill/>
+          <a:ln>
+            <a:noFill/>
+          </a:ln>
+        </p:spPr>
+        <p:txBody>
+          <a:bodyPr wrap="none" lIns="0" tIns="0" rIns="0" bIns="0" anchor="t" anchorCtr="0">
+            <a:spAutoFit/>
+          </a:bodyPr>
+          <a:lstStyle/>
+          <a:p>
+            <a:pPr algn="ctr"/>
+            <a:r>
+              <a:rPr lang="zh-CN" sz="750" dirty="0">
+                <a:solidFill>
+                  <a:srgbClr val="555555"/>
+                </a:solidFill>
+                <a:latin typeface="Arial"/>
+                <a:ea typeface="Microsoft YaHei"/>
+                <a:cs typeface="Arial"/>
+              </a:rPr>
+              <a:t>during the call</a:t>
+            </a:r>
+          </a:p>
+        </p:txBody>
+      </p:sp>
+      <p:sp>
+        <p:nvSpPr>
+          <p:cNvPr id="46" name="Line 46"/>
+          <p:cNvSpPr/>
+          <p:nvPr/>
+        </p:nvSpPr>
+        <p:spPr>
+          <a:xfrm>
+            <a:off x="2676525" y="2790825"/>
+            <a:ext cx="1743075" cy="1"/>
+          </a:xfrm>
+          <a:prstGeom prst="line">
+            <a:avLst/>
+          </a:prstGeom>
+          <a:noFill/>
+          <a:ln w="14288">
+            <a:solidFill>
+              <a:srgbClr val="888888"/>
+            </a:solidFill>
+            <a:custDash>
+              <a:ds d="266666" sp="200000"/>
+            </a:custDash>
+            <a:tailEnd type="triangle" w="lg" len="lg"/>
+          </a:ln>
+        </p:spPr>
+      </p:sp>
+      <p:sp>
+        <p:nvSpPr>
+          <p:cNvPr id="47" name="Ellipse 47"/>
+          <p:cNvSpPr/>
+          <p:nvPr/>
+        </p:nvSpPr>
+        <p:spPr>
+          <a:xfrm>
+            <a:off x="9496425" y="2647950"/>
+            <a:ext cx="2057400" cy="762000"/>
+          </a:xfrm>
+          <a:prstGeom prst="ellipse">
+            <a:avLst/>
+          </a:prstGeom>
+          <a:solidFill>
+            <a:srgbClr val="CCCCCC"/>
+          </a:solidFill>
+          <a:ln>
+            <a:noFill/>
+          </a:ln>
+        </p:spPr>
+      </p:sp>
+      <p:sp>
+        <p:nvSpPr>
+          <p:cNvPr id="48" name="Ellipse 48"/>
+          <p:cNvSpPr/>
+          <p:nvPr/>
+        </p:nvSpPr>
+        <p:spPr>
+          <a:xfrm>
+            <a:off x="10887075" y="2533650"/>
+            <a:ext cx="571500" cy="571500"/>
+          </a:xfrm>
+          <a:prstGeom prst="ellipse">
+            <a:avLst/>
+          </a:prstGeom>
+          <a:solidFill>
+            <a:srgbClr val="CCCCCC"/>
+          </a:solidFill>
+          <a:ln>
+            <a:noFill/>
+          </a:ln>
+        </p:spPr>
+      </p:sp>
+      <p:sp>
+        <p:nvSpPr>
+          <p:cNvPr id="49" name="Ellipse 49"/>
+          <p:cNvSpPr/>
+          <p:nvPr/>
+        </p:nvSpPr>
+        <p:spPr>
+          <a:xfrm>
+            <a:off x="10439400" y="2324100"/>
+            <a:ext cx="647700" cy="647700"/>
+          </a:xfrm>
+          <a:prstGeom prst="ellipse">
+            <a:avLst/>
+          </a:prstGeom>
+          <a:solidFill>
+            <a:srgbClr val="CCCCCC"/>
+          </a:solidFill>
+          <a:ln>
+            <a:noFill/>
+          </a:ln>
+        </p:spPr>
+      </p:sp>
+      <p:sp>
+        <p:nvSpPr>
+          <p:cNvPr id="50" name="Ellipse 50"/>
+          <p:cNvSpPr/>
+          <p:nvPr/>
+        </p:nvSpPr>
+        <p:spPr>
+          <a:xfrm>
+            <a:off x="9982200" y="2333625"/>
+            <a:ext cx="571500" cy="571500"/>
+          </a:xfrm>
+          <a:prstGeom prst="ellipse">
+            <a:avLst/>
+          </a:prstGeom>
+          <a:solidFill>
+            <a:srgbClr val="CCCCCC"/>
+          </a:solidFill>
+          <a:ln>
+            <a:noFill/>
+          </a:ln>
+        </p:spPr>
+      </p:sp>
+      <p:sp>
+        <p:nvSpPr>
+          <p:cNvPr id="51" name="Ellipse 51"/>
+          <p:cNvSpPr/>
+          <p:nvPr/>
+        </p:nvSpPr>
+        <p:spPr>
+          <a:xfrm>
+            <a:off x="9601200" y="2486025"/>
+            <a:ext cx="495300" cy="495300"/>
+          </a:xfrm>
+          <a:prstGeom prst="ellipse">
+            <a:avLst/>
+          </a:prstGeom>
+          <a:solidFill>
+            <a:srgbClr val="CCCCCC"/>
+          </a:solidFill>
+          <a:ln>
+            <a:noFill/>
+          </a:ln>
+        </p:spPr>
+      </p:sp>
+      <p:sp>
+        <p:nvSpPr>
+          <p:cNvPr id="52" name="TextBox 52"/>
+          <p:cNvSpPr txBox="1"/>
+          <p:nvPr/>
+        </p:nvSpPr>
+        <p:spPr>
+          <a:xfrm>
+            <a:off x="10151595" y="2734628"/>
+            <a:ext cx="747060" cy="213360"/>
+          </a:xfrm>
+          <a:prstGeom prst="rect">
+            <a:avLst/>
+          </a:prstGeom>
+          <a:noFill/>
+          <a:ln>
+            <a:noFill/>
+          </a:ln>
+        </p:spPr>
+        <p:txBody>
+          <a:bodyPr wrap="none" lIns="0" tIns="0" rIns="0" bIns="0" anchor="t" anchorCtr="0">
+            <a:spAutoFit/>
+          </a:bodyPr>
+          <a:lstStyle/>
+          <a:p>
+            <a:pPr algn="ctr"/>
+            <a:r>
+              <a:rPr lang="zh-CN" sz="1050" b="1" dirty="0">
+                <a:solidFill>
+                  <a:srgbClr val="333333"/>
+                </a:solidFill>
+                <a:latin typeface="Arial"/>
+                <a:ea typeface="Microsoft YaHei"/>
+                <a:cs typeface="Arial"/>
+              </a:rPr>
+              <a:t>Questions</a:t>
+            </a:r>
+          </a:p>
+        </p:txBody>
+      </p:sp>
+      <p:sp>
+        <p:nvSpPr>
+          <p:cNvPr id="53" name="TextBox 53"/>
+          <p:cNvSpPr txBox="1"/>
+          <p:nvPr/>
+        </p:nvSpPr>
+        <p:spPr>
+          <a:xfrm>
+            <a:off x="10098048" y="2928938"/>
+            <a:ext cx="854154" cy="152400"/>
+          </a:xfrm>
+          <a:prstGeom prst="rect">
+            <a:avLst/>
+          </a:prstGeom>
+          <a:noFill/>
+          <a:ln>
+            <a:noFill/>
+          </a:ln>
+        </p:spPr>
+        <p:txBody>
+          <a:bodyPr wrap="none" lIns="0" tIns="0" rIns="0" bIns="0" anchor="t" anchorCtr="0">
+            <a:spAutoFit/>
+          </a:bodyPr>
+          <a:lstStyle/>
+          <a:p>
+            <a:pPr algn="ctr"/>
+            <a:r>
+              <a:rPr lang="zh-CN" sz="750" dirty="0">
+                <a:solidFill>
+                  <a:srgbClr val="555555"/>
+                </a:solidFill>
+                <a:latin typeface="Arial"/>
+                <a:ea typeface="Microsoft YaHei"/>
+                <a:cs typeface="Arial"/>
+              </a:rPr>
+              <a:t>Physician enquiry</a:t>
+            </a:r>
+          </a:p>
+        </p:txBody>
+      </p:sp>
+      <p:sp>
+        <p:nvSpPr>
+          <p:cNvPr id="54" name="TextBox 54"/>
+          <p:cNvSpPr txBox="1"/>
+          <p:nvPr/>
+        </p:nvSpPr>
+        <p:spPr>
+          <a:xfrm>
+            <a:off x="10075545" y="3062288"/>
+            <a:ext cx="899160" cy="152400"/>
+          </a:xfrm>
+          <a:prstGeom prst="rect">
+            <a:avLst/>
+          </a:prstGeom>
+          <a:noFill/>
+          <a:ln>
+            <a:noFill/>
+          </a:ln>
+        </p:spPr>
+        <p:txBody>
+          <a:bodyPr wrap="none" lIns="0" tIns="0" rIns="0" bIns="0" anchor="t" anchorCtr="0">
+            <a:spAutoFit/>
+          </a:bodyPr>
+          <a:lstStyle/>
+          <a:p>
+            <a:pPr algn="ctr"/>
+            <a:r>
+              <a:rPr lang="zh-CN" sz="750" dirty="0">
+                <a:solidFill>
+                  <a:srgbClr val="555555"/>
+                </a:solidFill>
+                <a:latin typeface="Arial"/>
+                <a:ea typeface="Microsoft YaHei"/>
+                <a:cs typeface="Arial"/>
+              </a:rPr>
+              <a:t>seeking more data</a:t>
+            </a:r>
+          </a:p>
+        </p:txBody>
+      </p:sp>
+      <p:sp>
+        <p:nvSpPr>
+          <p:cNvPr id="55" name="Line 55"/>
+          <p:cNvSpPr/>
+          <p:nvPr/>
+        </p:nvSpPr>
+        <p:spPr>
+          <a:xfrm flipH="1">
+            <a:off x="7772400" y="2790825"/>
+            <a:ext cx="1762125" cy="1"/>
+          </a:xfrm>
+          <a:prstGeom prst="line">
+            <a:avLst/>
+          </a:prstGeom>
+          <a:noFill/>
+          <a:ln w="14288">
+            <a:solidFill>
+              <a:srgbClr val="888888"/>
+            </a:solidFill>
+            <a:custDash>
+              <a:ds d="266666" sp="200000"/>
+            </a:custDash>
+            <a:tailEnd type="triangle" w="lg" len="lg"/>
+          </a:ln>
+        </p:spPr>
+      </p:sp>
+      <p:sp>
+        <p:nvSpPr>
+          <p:cNvPr id="56" name="Ellipse 56"/>
+          <p:cNvSpPr/>
+          <p:nvPr/>
+        </p:nvSpPr>
+        <p:spPr>
+          <a:xfrm>
+            <a:off x="8886825" y="4019550"/>
+            <a:ext cx="2895600" cy="647700"/>
+          </a:xfrm>
+          <a:prstGeom prst="ellipse">
+            <a:avLst/>
+          </a:prstGeom>
+          <a:solidFill>
+            <a:srgbClr val="FFD700"/>
+          </a:solidFill>
+          <a:ln>
+            <a:noFill/>
+          </a:ln>
+        </p:spPr>
+      </p:sp>
+      <p:sp>
+        <p:nvSpPr>
+          <p:cNvPr id="57" name="TextBox 57"/>
+          <p:cNvSpPr txBox="1"/>
+          <p:nvPr/>
+        </p:nvSpPr>
+        <p:spPr>
+          <a:xfrm>
+            <a:off x="9994174" y="4182428"/>
+            <a:ext cx="680902" cy="213360"/>
+          </a:xfrm>
+          <a:prstGeom prst="rect">
+            <a:avLst/>
+          </a:prstGeom>
+          <a:noFill/>
+          <a:ln>
+            <a:noFill/>
+          </a:ln>
+        </p:spPr>
+        <p:txBody>
+          <a:bodyPr wrap="none" lIns="0" tIns="0" rIns="0" bIns="0" anchor="t" anchorCtr="0">
+            <a:spAutoFit/>
+          </a:bodyPr>
+          <a:lstStyle/>
+          <a:p>
+            <a:pPr algn="ctr"/>
+            <a:r>
+              <a:rPr lang="zh-CN" sz="1050" b="1" dirty="0">
+                <a:solidFill>
+                  <a:srgbClr val="5A3A00"/>
+                </a:solidFill>
+                <a:latin typeface="Arial"/>
+                <a:ea typeface="Microsoft YaHei"/>
+                <a:cs typeface="Arial"/>
+              </a:rPr>
+              <a:t>Post-Call</a:t>
+            </a:r>
+          </a:p>
+        </p:txBody>
+      </p:sp>
+      <p:sp>
+        <p:nvSpPr>
+          <p:cNvPr id="58" name="TextBox 58"/>
+          <p:cNvSpPr txBox="1"/>
+          <p:nvPr/>
+        </p:nvSpPr>
+        <p:spPr>
+          <a:xfrm>
+            <a:off x="10089166" y="4389120"/>
+            <a:ext cx="490919" cy="182880"/>
+          </a:xfrm>
+          <a:prstGeom prst="rect">
+            <a:avLst/>
+          </a:prstGeom>
+          <a:noFill/>
+          <a:ln>
+            <a:noFill/>
+          </a:ln>
+        </p:spPr>
+        <p:txBody>
+          <a:bodyPr wrap="none" lIns="0" tIns="0" rIns="0" bIns="0" anchor="t" anchorCtr="0">
+            <a:spAutoFit/>
+          </a:bodyPr>
+          <a:lstStyle/>
+          <a:p>
+            <a:pPr algn="ctr"/>
+            <a:r>
+              <a:rPr lang="zh-CN" sz="900" dirty="0">
+                <a:solidFill>
+                  <a:srgbClr val="5A3A00"/>
+                </a:solidFill>
+                <a:latin typeface="Arial"/>
+                <a:ea typeface="Microsoft YaHei"/>
+                <a:cs typeface="Arial"/>
+              </a:rPr>
+              <a:t>Analysis</a:t>
+            </a:r>
+          </a:p>
+        </p:txBody>
+      </p:sp>
+      <p:sp>
+        <p:nvSpPr>
+          <p:cNvPr id="59" name="Line 59"/>
+          <p:cNvSpPr/>
+          <p:nvPr/>
+        </p:nvSpPr>
+        <p:spPr>
+          <a:xfrm>
+            <a:off x="7191375" y="4343400"/>
+            <a:ext cx="1695450" cy="1"/>
+          </a:xfrm>
+          <a:prstGeom prst="line">
+            <a:avLst/>
+          </a:prstGeom>
+          <a:noFill/>
+          <a:ln w="17145">
+            <a:solidFill>
+              <a:srgbClr val="8B6900"/>
+            </a:solidFill>
+            <a:custDash>
+              <a:ds d="277777" sp="166666"/>
+            </a:custDash>
+            <a:tailEnd type="triangle" w="lg" len="lg"/>
+          </a:ln>
+        </p:spPr>
+      </p:sp>
+      <p:sp>
+        <p:nvSpPr>
+          <p:cNvPr id="60" name="Rectangle 60"/>
+          <p:cNvSpPr/>
+          <p:nvPr/>
+        </p:nvSpPr>
+        <p:spPr>
+          <a:xfrm>
+            <a:off x="381000" y="4819650"/>
+            <a:ext cx="2305050" cy="781050"/>
+          </a:xfrm>
+          <a:prstGeom prst="roundRect">
+            <a:avLst>
+              <a:gd name="adj" fmla="val 9756"/>
+            </a:avLst>
+          </a:prstGeom>
+          <a:solidFill>
+            <a:srgbClr val="F5F5F5"/>
+          </a:solidFill>
+          <a:ln w="14288">
+            <a:solidFill>
+              <a:srgbClr val="E0E0E0"/>
+            </a:solidFill>
+          </a:ln>
+          <a:effectLst>
+            <a:outerShdw blurRad="76200" dist="19050" dir="5400000" algn="ctr" rotWithShape="0">
+              <a:srgbClr val="000000">
+                <a:alpha val="5250"/>
+              </a:srgbClr>
+            </a:outerShdw>
+          </a:effectLst>
+        </p:spPr>
+      </p:sp>
+      <p:sp>
+        <p:nvSpPr>
+          <p:cNvPr id="61" name="Rectangle 61"/>
+          <p:cNvSpPr/>
+          <p:nvPr/>
+        </p:nvSpPr>
+        <p:spPr>
+          <a:xfrm>
+            <a:off x="381000" y="4819650"/>
+            <a:ext cx="2305050" cy="47625"/>
+          </a:xfrm>
+          <a:prstGeom prst="roundRect">
+            <a:avLst>
+              <a:gd name="adj" fmla="val 50000"/>
+            </a:avLst>
+          </a:prstGeom>
+          <a:solidFill>
+            <a:srgbClr val="AE232F"/>
+          </a:solidFill>
+          <a:ln>
+            <a:noFill/>
+          </a:ln>
+        </p:spPr>
+      </p:sp>
+      <p:sp>
+        <p:nvSpPr>
+          <p:cNvPr id="62" name="Freeform 62"/>
+          <p:cNvSpPr/>
+          <p:nvPr/>
+        </p:nvSpPr>
+        <p:spPr>
+          <a:xfrm>
+            <a:off x="573088" y="5022056"/>
+            <a:ext cx="206375" cy="196539"/>
           </a:xfrm>
           <a:custGeom>
             <a:avLst/>
@@ -25303,30 +26468,128 @@
             <a:cxnLst/>
             <a:rect l="l" t="t" r="r" b="b"/>
             <a:pathLst>
-              <a:path w="2057400" h="762000">
+              <a:path w="206375" h="196539">
                 <a:moveTo>
-                  <a:pt x="0" y="0"/>
+                  <a:pt x="165100" y="0"/>
+                </a:moveTo>
+                <a:cubicBezTo>
+                  <a:pt x="187896" y="0"/>
+                  <a:pt x="206375" y="18479"/>
+                  <a:pt x="206375" y="41275"/>
+                </a:cubicBezTo>
+                <a:lnTo>
+                  <a:pt x="206375" y="123825"/>
+                </a:lnTo>
+                <a:cubicBezTo>
+                  <a:pt x="206375" y="146621"/>
+                  <a:pt x="187896" y="165100"/>
+                  <a:pt x="165100" y="165100"/>
+                </a:cubicBezTo>
+                <a:lnTo>
+                  <a:pt x="116354" y="165100"/>
+                </a:lnTo>
+                <a:lnTo>
+                  <a:pt x="67216" y="194581"/>
+                </a:lnTo>
+                <a:cubicBezTo>
+                  <a:pt x="64209" y="196385"/>
+                  <a:pt x="60492" y="196539"/>
+                  <a:pt x="57346" y="194989"/>
+                </a:cubicBezTo>
+                <a:cubicBezTo>
+                  <a:pt x="54200" y="193439"/>
+                  <a:pt x="52057" y="190398"/>
+                  <a:pt x="51656" y="186914"/>
+                </a:cubicBezTo>
+                <a:lnTo>
+                  <a:pt x="51594" y="185738"/>
+                </a:lnTo>
+                <a:lnTo>
+                  <a:pt x="51594" y="165100"/>
+                </a:lnTo>
+                <a:lnTo>
+                  <a:pt x="41275" y="165100"/>
+                </a:lnTo>
+                <a:cubicBezTo>
+                  <a:pt x="19282" y="165100"/>
+                  <a:pt x="1151" y="147855"/>
+                  <a:pt x="52" y="125889"/>
+                </a:cubicBezTo>
+                <a:lnTo>
+                  <a:pt x="0" y="123825"/>
+                </a:lnTo>
+                <a:lnTo>
+                  <a:pt x="0" y="41275"/>
+                </a:lnTo>
+                <a:cubicBezTo>
+                  <a:pt x="0" y="18479"/>
+                  <a:pt x="18479" y="0"/>
+                  <a:pt x="41275" y="0"/>
+                </a:cubicBezTo>
+                <a:close/>
+                <a:moveTo>
+                  <a:pt x="123825" y="92869"/>
                 </a:moveTo>
                 <a:lnTo>
-                  <a:pt x="1828800" y="0"/>
+                  <a:pt x="61913" y="92869"/>
                 </a:lnTo>
+                <a:cubicBezTo>
+                  <a:pt x="56214" y="92869"/>
+                  <a:pt x="51594" y="97489"/>
+                  <a:pt x="51594" y="103188"/>
+                </a:cubicBezTo>
+                <a:cubicBezTo>
+                  <a:pt x="51594" y="108886"/>
+                  <a:pt x="56214" y="113506"/>
+                  <a:pt x="61913" y="113506"/>
+                </a:cubicBezTo>
                 <a:lnTo>
-                  <a:pt x="2057400" y="381000"/>
+                  <a:pt x="123825" y="113506"/>
                 </a:lnTo>
+                <a:cubicBezTo>
+                  <a:pt x="129524" y="113506"/>
+                  <a:pt x="134144" y="108886"/>
+                  <a:pt x="134144" y="103188"/>
+                </a:cubicBezTo>
+                <a:cubicBezTo>
+                  <a:pt x="134144" y="97489"/>
+                  <a:pt x="129524" y="92869"/>
+                  <a:pt x="123825" y="92869"/>
+                </a:cubicBezTo>
+                <a:moveTo>
+                  <a:pt x="144462" y="51594"/>
+                </a:moveTo>
                 <a:lnTo>
-                  <a:pt x="1828800" y="762000"/>
+                  <a:pt x="61913" y="51594"/>
                 </a:lnTo>
+                <a:cubicBezTo>
+                  <a:pt x="56214" y="51594"/>
+                  <a:pt x="51594" y="56214"/>
+                  <a:pt x="51594" y="61912"/>
+                </a:cubicBezTo>
+                <a:cubicBezTo>
+                  <a:pt x="51594" y="67611"/>
+                  <a:pt x="56214" y="72231"/>
+                  <a:pt x="61913" y="72231"/>
+                </a:cubicBezTo>
                 <a:lnTo>
-                  <a:pt x="0" y="762000"/>
+                  <a:pt x="144462" y="72231"/>
                 </a:lnTo>
-                <a:close/>
+                <a:cubicBezTo>
+                  <a:pt x="150161" y="72231"/>
+                  <a:pt x="154781" y="67611"/>
+                  <a:pt x="154781" y="61912"/>
+                </a:cubicBezTo>
+                <a:cubicBezTo>
+                  <a:pt x="154781" y="56214"/>
+                  <a:pt x="150161" y="51594"/>
+                  <a:pt x="144462" y="51594"/>
+                </a:cubicBezTo>
               </a:path>
             </a:pathLst>
           </a:custGeom>
           <a:solidFill>
-            <a:srgbClr val="AE232F">
-              <a:alpha val="55000"/>
-            </a:srgbClr>
+            <a:srgbClr val="AE232F"/>
           </a:solidFill>
           <a:ln>
             <a:noFill/>
@@ -25335,14 +26598,205 @@
       </p:sp>
       <p:sp>
         <p:nvSpPr>
-          <p:cNvPr id="24" name="Freeform 24"/>
+          <p:cNvPr id="63" name="TextBox 63"/>
+          <p:cNvSpPr txBox="1"/>
+          <p:nvPr/>
+        </p:nvSpPr>
+        <p:spPr>
+          <a:xfrm>
+            <a:off x="902018" y="4942999"/>
+            <a:ext cx="1376284" cy="198120"/>
+          </a:xfrm>
+          <a:prstGeom prst="rect">
+            <a:avLst/>
+          </a:prstGeom>
+          <a:noFill/>
+          <a:ln>
+            <a:noFill/>
+          </a:ln>
+        </p:spPr>
+        <p:txBody>
+          <a:bodyPr wrap="none" lIns="0" tIns="0" rIns="0" bIns="0" anchor="t" anchorCtr="0">
+            <a:spAutoFit/>
+          </a:bodyPr>
+          <a:lstStyle/>
+          <a:p>
+            <a:pPr algn="l"/>
+            <a:r>
+              <a:rPr lang="zh-CN" sz="975" b="1" dirty="0">
+                <a:solidFill>
+                  <a:srgbClr val="1A1A1A"/>
+                </a:solidFill>
+                <a:latin typeface="Arial"/>
+                <a:ea typeface="Microsoft YaHei"/>
+                <a:cs typeface="Arial"/>
+              </a:rPr>
+              <a:t>Communication Skills</a:t>
+            </a:r>
+          </a:p>
+        </p:txBody>
+      </p:sp>
+      <p:sp>
+        <p:nvSpPr>
+          <p:cNvPr id="64" name="TextBox 64"/>
+          <p:cNvSpPr txBox="1"/>
+          <p:nvPr/>
+        </p:nvSpPr>
+        <p:spPr>
+          <a:xfrm>
+            <a:off x="903922" y="5121116"/>
+            <a:ext cx="1423630" cy="167640"/>
+          </a:xfrm>
+          <a:prstGeom prst="rect">
+            <a:avLst/>
+          </a:prstGeom>
+          <a:noFill/>
+          <a:ln>
+            <a:noFill/>
+          </a:ln>
+        </p:spPr>
+        <p:txBody>
+          <a:bodyPr wrap="none" lIns="0" tIns="0" rIns="0" bIns="0" anchor="t" anchorCtr="0">
+            <a:spAutoFit/>
+          </a:bodyPr>
+          <a:lstStyle/>
+          <a:p>
+            <a:pPr algn="l"/>
+            <a:r>
+              <a:rPr lang="zh-CN" sz="825" dirty="0">
+                <a:solidFill>
+                  <a:srgbClr val="555555"/>
+                </a:solidFill>
+                <a:latin typeface="Arial"/>
+                <a:ea typeface="Microsoft YaHei"/>
+                <a:cs typeface="Arial"/>
+              </a:rPr>
+              <a:t>Active listening · Empathy</a:t>
+            </a:r>
+          </a:p>
+        </p:txBody>
+      </p:sp>
+      <p:sp>
+        <p:nvSpPr>
+          <p:cNvPr id="65" name="TextBox 65"/>
+          <p:cNvSpPr txBox="1"/>
+          <p:nvPr/>
+        </p:nvSpPr>
+        <p:spPr>
+          <a:xfrm>
+            <a:off x="903922" y="5263991"/>
+            <a:ext cx="1764673" cy="167640"/>
+          </a:xfrm>
+          <a:prstGeom prst="rect">
+            <a:avLst/>
+          </a:prstGeom>
+          <a:noFill/>
+          <a:ln>
+            <a:noFill/>
+          </a:ln>
+        </p:spPr>
+        <p:txBody>
+          <a:bodyPr wrap="none" lIns="0" tIns="0" rIns="0" bIns="0" anchor="t" anchorCtr="0">
+            <a:spAutoFit/>
+          </a:bodyPr>
+          <a:lstStyle/>
+          <a:p>
+            <a:pPr algn="l"/>
+            <a:r>
+              <a:rPr lang="zh-CN" sz="825" dirty="0">
+                <a:solidFill>
+                  <a:srgbClr val="555555"/>
+                </a:solidFill>
+                <a:latin typeface="Arial"/>
+                <a:ea typeface="Microsoft YaHei"/>
+                <a:cs typeface="Arial"/>
+              </a:rPr>
+              <a:t>Non-verbal cues · Trust-building</a:t>
+            </a:r>
+          </a:p>
+        </p:txBody>
+      </p:sp>
+      <p:sp>
+        <p:nvSpPr>
+          <p:cNvPr id="66" name="TextBox 66"/>
+          <p:cNvSpPr txBox="1"/>
+          <p:nvPr/>
+        </p:nvSpPr>
+        <p:spPr>
+          <a:xfrm>
+            <a:off x="542925" y="5462588"/>
+            <a:ext cx="2219325" cy="152400"/>
+          </a:xfrm>
+          <a:prstGeom prst="rect">
+            <a:avLst/>
+          </a:prstGeom>
+          <a:noFill/>
+          <a:ln>
+            <a:noFill/>
+          </a:ln>
+        </p:spPr>
+        <p:txBody>
+          <a:bodyPr wrap="none" lIns="0" tIns="0" rIns="0" bIns="0" anchor="t" anchorCtr="0">
+            <a:spAutoFit/>
+          </a:bodyPr>
+          <a:lstStyle/>
+          <a:p>
+            <a:pPr algn="l"/>
+            <a:r>
+              <a:rPr lang="zh-CN" sz="750" i="1" dirty="0">
+                <a:solidFill>
+                  <a:srgbClr val="AE232F"/>
+                </a:solidFill>
+                <a:latin typeface="Arial"/>
+                <a:ea typeface="Microsoft YaHei"/>
+                <a:cs typeface="Arial"/>
+              </a:rPr>
+              <a:t>Foundation underlying every stage of the call</a:t>
+            </a:r>
+          </a:p>
+        </p:txBody>
+      </p:sp>
+      <p:sp>
+        <p:nvSpPr>
+          <p:cNvPr id="67" name="Rectangle 67"/>
           <p:cNvSpPr/>
           <p:nvPr/>
         </p:nvSpPr>
         <p:spPr>
           <a:xfrm>
-            <a:off x="6486029" y="1428769"/>
-            <a:ext cx="210437" cy="200562"/>
+            <a:off x="342900" y="5772150"/>
+            <a:ext cx="11506200" cy="552450"/>
+          </a:xfrm>
+          <a:prstGeom prst="roundRect">
+            <a:avLst>
+              <a:gd name="adj" fmla="val 10345"/>
+            </a:avLst>
+          </a:prstGeom>
+          <a:solidFill>
+            <a:srgbClr val="AE232F"/>
+          </a:solidFill>
+          <a:ln>
+            <a:noFill/>
+          </a:ln>
+          <a:effectLst>
+            <a:outerShdw blurRad="76200" dist="19050" dir="5400000" algn="ctr" rotWithShape="0">
+              <a:srgbClr val="000000">
+                <a:alpha val="5250"/>
+              </a:srgbClr>
+            </a:outerShdw>
+          </a:effectLst>
+        </p:spPr>
+      </p:sp>
+      <p:sp>
+        <p:nvSpPr>
+          <p:cNvPr id="68" name="Freeform 68"/>
+          <p:cNvSpPr/>
+          <p:nvPr/>
+        </p:nvSpPr>
+        <p:spPr>
+          <a:xfrm>
+            <a:off x="521875" y="5894404"/>
+            <a:ext cx="175364" cy="167135"/>
           </a:xfrm>
           <a:custGeom>
             <a:avLst/>
@@ -25351,101 +26805,101 @@
             <a:cxnLst/>
             <a:rect l="l" t="t" r="r" b="b"/>
             <a:pathLst>
-              <a:path w="210437" h="200562">
+              <a:path w="175364" h="167135">
                 <a:moveTo>
-                  <a:pt x="69485" y="60369"/>
+                  <a:pt x="57904" y="50308"/>
                 </a:moveTo>
                 <a:lnTo>
-                  <a:pt x="8716" y="69180"/>
+                  <a:pt x="7263" y="57650"/>
                 </a:lnTo>
                 <a:lnTo>
-                  <a:pt x="7639" y="69399"/>
+                  <a:pt x="6366" y="57832"/>
                 </a:lnTo>
                 <a:cubicBezTo>
-                  <a:pt x="4322" y="70279"/>
-                  <a:pt x="1735" y="72877"/>
-                  <a:pt x="868" y="76197"/>
+                  <a:pt x="3602" y="58566"/>
+                  <a:pt x="1446" y="60730"/>
+                  <a:pt x="723" y="63498"/>
                 </a:cubicBezTo>
                 <a:cubicBezTo>
-                  <a:pt x="0" y="79518"/>
-                  <a:pt x="986" y="83048"/>
-                  <a:pt x="3448" y="85439"/>
+                  <a:pt x="0" y="66265"/>
+                  <a:pt x="822" y="69207"/>
+                  <a:pt x="2874" y="71199"/>
                 </a:cubicBezTo>
                 <a:lnTo>
-                  <a:pt x="47473" y="128292"/>
+                  <a:pt x="39561" y="106910"/>
                 </a:lnTo>
                 <a:lnTo>
-                  <a:pt x="37091" y="188823"/>
+                  <a:pt x="30909" y="157353"/>
                 </a:lnTo>
                 <a:lnTo>
-                  <a:pt x="36967" y="189871"/>
+                  <a:pt x="30806" y="158226"/>
                 </a:lnTo>
                 <a:cubicBezTo>
-                  <a:pt x="36764" y="193302"/>
-                  <a:pt x="38425" y="196576"/>
-                  <a:pt x="41313" y="198439"/>
+                  <a:pt x="30636" y="161085"/>
+                  <a:pt x="32021" y="163814"/>
+                  <a:pt x="34428" y="165366"/>
                 </a:cubicBezTo>
                 <a:cubicBezTo>
-                  <a:pt x="44202" y="200301"/>
-                  <a:pt x="47870" y="200463"/>
-                  <a:pt x="50911" y="198863"/>
+                  <a:pt x="36835" y="166918"/>
+                  <a:pt x="39892" y="167053"/>
+                  <a:pt x="42426" y="165719"/>
                 </a:cubicBezTo>
                 <a:lnTo>
-                  <a:pt x="105261" y="170288"/>
+                  <a:pt x="87718" y="141906"/>
                 </a:lnTo>
                 <a:lnTo>
-                  <a:pt x="159487" y="198863"/>
+                  <a:pt x="132906" y="165719"/>
                 </a:lnTo>
                 <a:lnTo>
-                  <a:pt x="160439" y="199301"/>
+                  <a:pt x="133699" y="166084"/>
                 </a:lnTo>
                 <a:cubicBezTo>
-                  <a:pt x="163640" y="200562"/>
-                  <a:pt x="167273" y="199998"/>
-                  <a:pt x="169941" y="197827"/>
+                  <a:pt x="136367" y="167135"/>
+                  <a:pt x="139394" y="166665"/>
+                  <a:pt x="141618" y="164856"/>
                 </a:cubicBezTo>
                 <a:cubicBezTo>
-                  <a:pt x="172610" y="195656"/>
-                  <a:pt x="173901" y="192214"/>
-                  <a:pt x="173317" y="188823"/>
+                  <a:pt x="143842" y="163046"/>
+                  <a:pt x="144917" y="160178"/>
+                  <a:pt x="144431" y="157353"/>
                 </a:cubicBezTo>
                 <a:lnTo>
-                  <a:pt x="162925" y="128292"/>
+                  <a:pt x="135771" y="106910"/>
                 </a:lnTo>
                 <a:lnTo>
-                  <a:pt x="206969" y="85429"/>
+                  <a:pt x="172474" y="71191"/>
                 </a:lnTo>
                 <a:lnTo>
-                  <a:pt x="207712" y="84620"/>
+                  <a:pt x="173093" y="70517"/>
                 </a:lnTo>
                 <a:cubicBezTo>
-                  <a:pt x="209872" y="81959"/>
-                  <a:pt x="210437" y="78342"/>
-                  <a:pt x="209189" y="75149"/>
+                  <a:pt x="174894" y="68299"/>
+                  <a:pt x="175364" y="65285"/>
+                  <a:pt x="174324" y="62624"/>
                 </a:cubicBezTo>
                 <a:cubicBezTo>
-                  <a:pt x="207942" y="71957"/>
-                  <a:pt x="205075" y="69681"/>
-                  <a:pt x="201683" y="69189"/>
+                  <a:pt x="173285" y="59964"/>
+                  <a:pt x="170896" y="58067"/>
+                  <a:pt x="168069" y="57658"/>
                 </a:cubicBezTo>
                 <a:lnTo>
-                  <a:pt x="140913" y="60369"/>
+                  <a:pt x="117428" y="50308"/>
                 </a:lnTo>
                 <a:lnTo>
-                  <a:pt x="113748" y="5315"/>
+                  <a:pt x="94790" y="4429"/>
                 </a:lnTo>
                 <a:cubicBezTo>
-                  <a:pt x="112144" y="2061"/>
-                  <a:pt x="108832" y="0"/>
-                  <a:pt x="105204" y="0"/>
+                  <a:pt x="93454" y="1717"/>
+                  <a:pt x="90693" y="0"/>
+                  <a:pt x="87670" y="0"/>
                 </a:cubicBezTo>
                 <a:cubicBezTo>
-                  <a:pt x="101576" y="0"/>
-                  <a:pt x="98263" y="2061"/>
-                  <a:pt x="96660" y="5315"/>
+                  <a:pt x="84647" y="0"/>
+                  <a:pt x="81886" y="1717"/>
+                  <a:pt x="80550" y="4429"/>
                 </a:cubicBezTo>
                 <a:lnTo>
-                  <a:pt x="69485" y="60369"/>
+                  <a:pt x="57904" y="50308"/>
                 </a:lnTo>
                 <a:close/>
               </a:path>
@@ -25461,14 +26915,14 @@
       </p:sp>
       <p:sp>
         <p:nvSpPr>
-          <p:cNvPr id="25" name="TextBox 25"/>
+          <p:cNvPr id="69" name="TextBox 69"/>
           <p:cNvSpPr txBox="1"/>
           <p:nvPr/>
         </p:nvSpPr>
         <p:spPr>
           <a:xfrm>
-            <a:off x="7276493" y="1343025"/>
-            <a:ext cx="153614" cy="304800"/>
+            <a:off x="788670" y="5884545"/>
+            <a:ext cx="760052" cy="182880"/>
           </a:xfrm>
           <a:prstGeom prst="rect">
             <a:avLst/>
@@ -25484,9 +26938,9 @@
           </a:bodyPr>
           <a:lstStyle/>
           <a:p>
-            <a:pPr algn="ctr"/>
-            <a:r>
-              <a:rPr lang="zh-CN" sz="1500" b="1" dirty="0">
+            <a:pPr algn="l"/>
+            <a:r>
+              <a:rPr lang="zh-CN" sz="900" b="1" dirty="0">
                 <a:solidFill>
                   <a:srgbClr val="FFFFFF"/>
                 </a:solidFill>
@@ -25494,21 +26948,21 @@
                 <a:ea typeface="Microsoft YaHei"/>
                 <a:cs typeface="Arial"/>
               </a:rPr>
-              <a:t>P</a:t>
+              <a:t>Key insight:</a:t>
             </a:r>
           </a:p>
         </p:txBody>
       </p:sp>
       <p:sp>
         <p:nvSpPr>
-          <p:cNvPr id="26" name="TextBox 26"/>
+          <p:cNvPr id="70" name="TextBox 70"/>
           <p:cNvSpPr txBox="1"/>
           <p:nvPr/>
         </p:nvSpPr>
         <p:spPr>
           <a:xfrm>
-            <a:off x="7064470" y="1571149"/>
-            <a:ext cx="577659" cy="198120"/>
+            <a:off x="1588770" y="5884545"/>
+            <a:ext cx="5465540" cy="182880"/>
           </a:xfrm>
           <a:prstGeom prst="rect">
             <a:avLst/>
@@ -25524,49 +26978,9 @@
           </a:bodyPr>
           <a:lstStyle/>
           <a:p>
-            <a:pPr algn="ctr"/>
-            <a:r>
-              <a:rPr lang="zh-CN" sz="975" b="1" dirty="0">
-                <a:solidFill>
-                  <a:srgbClr val="FFFFFF"/>
-                </a:solidFill>
-                <a:latin typeface="Arial"/>
-                <a:ea typeface="Microsoft YaHei"/>
-                <a:cs typeface="Arial"/>
-              </a:rPr>
-              <a:t>PROJECT</a:t>
-            </a:r>
-          </a:p>
-        </p:txBody>
-      </p:sp>
-      <p:sp>
-        <p:nvSpPr>
-          <p:cNvPr id="27" name="TextBox 27"/>
-          <p:cNvSpPr txBox="1"/>
-          <p:nvPr/>
-        </p:nvSpPr>
-        <p:spPr>
-          <a:xfrm>
-            <a:off x="6946225" y="1766888"/>
-            <a:ext cx="814149" cy="152400"/>
-          </a:xfrm>
-          <a:prstGeom prst="rect">
-            <a:avLst/>
-          </a:prstGeom>
-          <a:noFill/>
-          <a:ln>
-            <a:noFill/>
-          </a:ln>
-        </p:spPr>
-        <p:txBody>
-          <a:bodyPr wrap="none" lIns="0" tIns="0" rIns="0" bIns="0" anchor="t" anchorCtr="0">
-            <a:spAutoFit/>
-          </a:bodyPr>
-          <a:lstStyle/>
-          <a:p>
-            <a:pPr algn="ctr"/>
-            <a:r>
-              <a:rPr lang="zh-CN" sz="750" dirty="0">
+            <a:pPr algn="l"/>
+            <a:r>
+              <a:rPr lang="zh-CN" sz="900" dirty="0">
                 <a:solidFill>
                   <a:srgbClr val="F9E5E7"/>
                 </a:solidFill>
@@ -25574,193 +26988,21 @@
                 <a:ea typeface="Microsoft YaHei"/>
                 <a:cs typeface="Arial"/>
               </a:rPr>
-              <a:t>Patient outcome</a:t>
+              <a:t>Pre-Call Preparation and Post-Call Analysis are what separate average MRs from great ones.</a:t>
             </a:r>
           </a:p>
         </p:txBody>
       </p:sp>
       <p:sp>
         <p:nvSpPr>
-          <p:cNvPr id="28" name="Polygon 28"/>
-          <p:cNvSpPr/>
-          <p:nvPr/>
-        </p:nvSpPr>
-        <p:spPr>
-          <a:xfrm>
-            <a:off x="8305800" y="1219200"/>
-            <a:ext cx="3505200" cy="762000"/>
-          </a:xfrm>
-          <a:custGeom>
-            <a:avLst/>
-            <a:gdLst/>
-            <a:ahLst/>
-            <a:cxnLst/>
-            <a:rect l="l" t="t" r="r" b="b"/>
-            <a:pathLst>
-              <a:path w="3505200" h="762000">
-                <a:moveTo>
-                  <a:pt x="0" y="0"/>
-                </a:moveTo>
-                <a:lnTo>
-                  <a:pt x="3505200" y="0"/>
-                </a:lnTo>
-                <a:lnTo>
-                  <a:pt x="3505200" y="762000"/>
-                </a:lnTo>
-                <a:lnTo>
-                  <a:pt x="0" y="762000"/>
-                </a:lnTo>
-                <a:lnTo>
-                  <a:pt x="228600" y="381000"/>
-                </a:lnTo>
-                <a:close/>
-              </a:path>
-            </a:pathLst>
-          </a:custGeom>
-          <a:solidFill>
-            <a:srgbClr val="AE232F">
-              <a:alpha val="40000"/>
-            </a:srgbClr>
-          </a:solidFill>
-          <a:ln>
-            <a:noFill/>
-          </a:ln>
-        </p:spPr>
-      </p:sp>
-      <p:sp>
-        <p:nvSpPr>
-          <p:cNvPr id="29" name="Freeform 29"/>
-          <p:cNvSpPr/>
-          <p:nvPr/>
-        </p:nvSpPr>
-        <p:spPr>
-          <a:xfrm>
-            <a:off x="8629650" y="1434008"/>
-            <a:ext cx="200311" cy="200639"/>
-          </a:xfrm>
-          <a:custGeom>
-            <a:avLst/>
-            <a:gdLst/>
-            <a:ahLst/>
-            <a:cxnLst/>
-            <a:rect l="l" t="t" r="r" b="b"/>
-            <a:pathLst>
-              <a:path w="200311" h="200639">
-                <a:moveTo>
-                  <a:pt x="142875" y="17030"/>
-                </a:moveTo>
-                <a:cubicBezTo>
-                  <a:pt x="182569" y="39949"/>
-                  <a:pt x="200311" y="87890"/>
-                  <a:pt x="185099" y="131128"/>
-                </a:cubicBezTo>
-                <a:cubicBezTo>
-                  <a:pt x="169888" y="174367"/>
-                  <a:pt x="126037" y="200639"/>
-                  <a:pt x="80736" y="193656"/>
-                </a:cubicBezTo>
-                <a:cubicBezTo>
-                  <a:pt x="35435" y="186673"/>
-                  <a:pt x="1532" y="148415"/>
-                  <a:pt x="48" y="102603"/>
-                </a:cubicBezTo>
-                <a:lnTo>
-                  <a:pt x="0" y="99517"/>
-                </a:lnTo>
-                <a:lnTo>
-                  <a:pt x="48" y="96431"/>
-                </a:lnTo>
-                <a:cubicBezTo>
-                  <a:pt x="1133" y="62969"/>
-                  <a:pt x="19706" y="32534"/>
-                  <a:pt x="48967" y="16267"/>
-                </a:cubicBezTo>
-                <a:cubicBezTo>
-                  <a:pt x="78228" y="0"/>
-                  <a:pt x="113882" y="290"/>
-                  <a:pt x="142875" y="17030"/>
-                </a:cubicBezTo>
-                <a:close/>
-                <a:moveTo>
-                  <a:pt x="130559" y="73732"/>
-                </a:moveTo>
-                <a:cubicBezTo>
-                  <a:pt x="127166" y="70339"/>
-                  <a:pt x="121778" y="70001"/>
-                  <a:pt x="117986" y="72942"/>
-                </a:cubicBezTo>
-                <a:lnTo>
-                  <a:pt x="117091" y="73732"/>
-                </a:lnTo>
-                <a:lnTo>
-                  <a:pt x="85725" y="105089"/>
-                </a:lnTo>
-                <a:lnTo>
-                  <a:pt x="73409" y="92782"/>
-                </a:lnTo>
-                <a:lnTo>
-                  <a:pt x="72514" y="91992"/>
-                </a:lnTo>
-                <a:cubicBezTo>
-                  <a:pt x="68722" y="89053"/>
-                  <a:pt x="63336" y="89392"/>
-                  <a:pt x="59943" y="92785"/>
-                </a:cubicBezTo>
-                <a:cubicBezTo>
-                  <a:pt x="56551" y="96177"/>
-                  <a:pt x="56211" y="101564"/>
-                  <a:pt x="59150" y="105355"/>
-                </a:cubicBezTo>
-                <a:lnTo>
-                  <a:pt x="59941" y="106251"/>
-                </a:lnTo>
-                <a:lnTo>
-                  <a:pt x="78991" y="125301"/>
-                </a:lnTo>
-                <a:lnTo>
-                  <a:pt x="79886" y="126091"/>
-                </a:lnTo>
-                <a:cubicBezTo>
-                  <a:pt x="83322" y="128757"/>
-                  <a:pt x="88128" y="128757"/>
-                  <a:pt x="91564" y="126091"/>
-                </a:cubicBezTo>
-                <a:lnTo>
-                  <a:pt x="92459" y="125301"/>
-                </a:lnTo>
-                <a:lnTo>
-                  <a:pt x="130559" y="87201"/>
-                </a:lnTo>
-                <a:lnTo>
-                  <a:pt x="131350" y="86305"/>
-                </a:lnTo>
-                <a:cubicBezTo>
-                  <a:pt x="134291" y="82514"/>
-                  <a:pt x="133952" y="77126"/>
-                  <a:pt x="130559" y="73732"/>
-                </a:cubicBezTo>
-                <a:close/>
-              </a:path>
-            </a:pathLst>
-          </a:custGeom>
-          <a:solidFill>
-            <a:srgbClr val="AE232F"/>
-          </a:solidFill>
-          <a:ln>
-            <a:noFill/>
-          </a:ln>
-        </p:spPr>
-      </p:sp>
-      <p:sp>
-        <p:nvSpPr>
-          <p:cNvPr id="30" name="TextBox 30"/>
+          <p:cNvPr id="71" name="TextBox 71"/>
           <p:cNvSpPr txBox="1"/>
           <p:nvPr/>
         </p:nvSpPr>
         <p:spPr>
           <a:xfrm>
-            <a:off x="10095893" y="1343025"/>
-            <a:ext cx="153614" cy="304800"/>
+            <a:off x="788670" y="6094095"/>
+            <a:ext cx="7559802" cy="182880"/>
           </a:xfrm>
           <a:prstGeom prst="rect">
             <a:avLst/>
@@ -25776,2109 +27018,9 @@
           </a:bodyPr>
           <a:lstStyle/>
           <a:p>
-            <a:pPr algn="ctr"/>
-            <a:r>
-              <a:rPr lang="zh-CN" sz="1500" b="1" dirty="0">
-                <a:solidFill>
-                  <a:srgbClr val="8A1B25"/>
-                </a:solidFill>
-                <a:latin typeface="Arial"/>
-                <a:ea typeface="Microsoft YaHei"/>
-                <a:cs typeface="Arial"/>
-              </a:rPr>
-              <a:t>T</a:t>
-            </a:r>
-          </a:p>
-        </p:txBody>
-      </p:sp>
-      <p:sp>
-        <p:nvSpPr>
-          <p:cNvPr id="31" name="TextBox 31"/>
-          <p:cNvSpPr txBox="1"/>
-          <p:nvPr/>
-        </p:nvSpPr>
-        <p:spPr>
-          <a:xfrm>
-            <a:off x="9866806" y="1571149"/>
-            <a:ext cx="611788" cy="198120"/>
-          </a:xfrm>
-          <a:prstGeom prst="rect">
-            <a:avLst/>
-          </a:prstGeom>
-          <a:noFill/>
-          <a:ln>
-            <a:noFill/>
-          </a:ln>
-        </p:spPr>
-        <p:txBody>
-          <a:bodyPr wrap="none" lIns="0" tIns="0" rIns="0" bIns="0" anchor="t" anchorCtr="0">
-            <a:spAutoFit/>
-          </a:bodyPr>
-          <a:lstStyle/>
-          <a:p>
-            <a:pPr algn="ctr"/>
-            <a:r>
-              <a:rPr lang="zh-CN" sz="975" b="1" dirty="0">
-                <a:solidFill>
-                  <a:srgbClr val="8A1B25"/>
-                </a:solidFill>
-                <a:latin typeface="Arial"/>
-                <a:ea typeface="Microsoft YaHei"/>
-                <a:cs typeface="Arial"/>
-              </a:rPr>
-              <a:t>TIE DOWN</a:t>
-            </a:r>
-          </a:p>
-        </p:txBody>
-      </p:sp>
-      <p:sp>
-        <p:nvSpPr>
-          <p:cNvPr id="32" name="TextBox 32"/>
-          <p:cNvSpPr txBox="1"/>
-          <p:nvPr/>
-        </p:nvSpPr>
-        <p:spPr>
-          <a:xfrm>
-            <a:off x="9698117" y="1766888"/>
-            <a:ext cx="949166" cy="152400"/>
-          </a:xfrm>
-          <a:prstGeom prst="rect">
-            <a:avLst/>
-          </a:prstGeom>
-          <a:noFill/>
-          <a:ln>
-            <a:noFill/>
-          </a:ln>
-        </p:spPr>
-        <p:txBody>
-          <a:bodyPr wrap="none" lIns="0" tIns="0" rIns="0" bIns="0" anchor="t" anchorCtr="0">
-            <a:spAutoFit/>
-          </a:bodyPr>
-          <a:lstStyle/>
-          <a:p>
-            <a:pPr algn="ctr"/>
-            <a:r>
-              <a:rPr lang="zh-CN" sz="750" dirty="0">
-                <a:solidFill>
-                  <a:srgbClr val="555555"/>
-                </a:solidFill>
-                <a:latin typeface="Arial"/>
-                <a:ea typeface="Microsoft YaHei"/>
-                <a:cs typeface="Arial"/>
-              </a:rPr>
-              <a:t>Commit &amp; next step</a:t>
-            </a:r>
-          </a:p>
-        </p:txBody>
-      </p:sp>
-      <p:sp>
-        <p:nvSpPr>
-          <p:cNvPr id="33" name="Rectangle 33"/>
-          <p:cNvSpPr/>
-          <p:nvPr/>
-        </p:nvSpPr>
-        <p:spPr>
-          <a:xfrm>
-            <a:off x="381000" y="2171700"/>
-            <a:ext cx="2057400" cy="1771650"/>
-          </a:xfrm>
-          <a:prstGeom prst="roundRect">
-            <a:avLst>
-              <a:gd name="adj" fmla="val 4301"/>
-            </a:avLst>
-          </a:prstGeom>
-          <a:solidFill>
-            <a:srgbClr val="FFFFFF"/>
-          </a:solidFill>
-          <a:ln w="9525">
-            <a:solidFill>
-              <a:srgbClr val="E0E0E0"/>
-            </a:solidFill>
-          </a:ln>
-          <a:effectLst>
-            <a:outerShdw blurRad="76200" dist="19050" dir="5400000" algn="ctr" rotWithShape="0">
-              <a:srgbClr val="000000">
-                <a:alpha val="5250"/>
-              </a:srgbClr>
-            </a:outerShdw>
-          </a:effectLst>
-        </p:spPr>
-      </p:sp>
-      <p:sp>
-        <p:nvSpPr>
-          <p:cNvPr id="34" name="Rectangle 34"/>
-          <p:cNvSpPr/>
-          <p:nvPr/>
-        </p:nvSpPr>
-        <p:spPr>
-          <a:xfrm>
-            <a:off x="381000" y="2171700"/>
-            <a:ext cx="2057400" cy="38100"/>
-          </a:xfrm>
-          <a:prstGeom prst="roundRect">
-            <a:avLst>
-              <a:gd name="adj" fmla="val 50000"/>
-            </a:avLst>
-          </a:prstGeom>
-          <a:solidFill>
-            <a:srgbClr val="AE232F"/>
-          </a:solidFill>
-          <a:ln>
-            <a:noFill/>
-          </a:ln>
-        </p:spPr>
-      </p:sp>
-      <p:sp>
-        <p:nvSpPr>
-          <p:cNvPr id="35" name="TextBox 35"/>
-          <p:cNvSpPr txBox="1"/>
-          <p:nvPr/>
-        </p:nvSpPr>
-        <p:spPr>
-          <a:xfrm>
-            <a:off x="1190344" y="2322195"/>
-            <a:ext cx="438712" cy="182880"/>
-          </a:xfrm>
-          <a:prstGeom prst="rect">
-            <a:avLst/>
-          </a:prstGeom>
-          <a:noFill/>
-          <a:ln>
-            <a:noFill/>
-          </a:ln>
-        </p:spPr>
-        <p:txBody>
-          <a:bodyPr wrap="none" lIns="0" tIns="0" rIns="0" bIns="0" anchor="t" anchorCtr="0">
-            <a:spAutoFit/>
-          </a:bodyPr>
-          <a:lstStyle/>
-          <a:p>
-            <a:pPr algn="ctr"/>
-            <a:r>
-              <a:rPr lang="zh-CN" sz="900" b="1" dirty="0">
-                <a:solidFill>
-                  <a:srgbClr val="AE232F"/>
-                </a:solidFill>
-                <a:latin typeface="Arial"/>
-                <a:ea typeface="Microsoft YaHei"/>
-                <a:cs typeface="Arial"/>
-              </a:rPr>
-              <a:t>Assess</a:t>
-            </a:r>
-          </a:p>
-        </p:txBody>
-      </p:sp>
-      <p:sp>
-        <p:nvSpPr>
-          <p:cNvPr id="36" name="TextBox 36"/>
-          <p:cNvSpPr txBox="1"/>
-          <p:nvPr/>
-        </p:nvSpPr>
-        <p:spPr>
-          <a:xfrm>
-            <a:off x="522922" y="2520791"/>
-            <a:ext cx="1302615" cy="167640"/>
-          </a:xfrm>
-          <a:prstGeom prst="rect">
-            <a:avLst/>
-          </a:prstGeom>
-          <a:noFill/>
-          <a:ln>
-            <a:noFill/>
-          </a:ln>
-        </p:spPr>
-        <p:txBody>
-          <a:bodyPr wrap="none" lIns="0" tIns="0" rIns="0" bIns="0" anchor="t" anchorCtr="0">
-            <a:spAutoFit/>
-          </a:bodyPr>
-          <a:lstStyle/>
-          <a:p>
             <a:pPr algn="l"/>
             <a:r>
-              <a:rPr lang="zh-CN" sz="825" dirty="0">
-                <a:solidFill>
-                  <a:srgbClr val="1A1A1A"/>
-                </a:solidFill>
-                <a:latin typeface="Arial"/>
-                <a:ea typeface="Microsoft YaHei"/>
-                <a:cs typeface="Arial"/>
-              </a:rPr>
-              <a:t>Review physician profile</a:t>
-            </a:r>
-          </a:p>
-        </p:txBody>
-      </p:sp>
-      <p:sp>
-        <p:nvSpPr>
-          <p:cNvPr id="37" name="TextBox 37"/>
-          <p:cNvSpPr txBox="1"/>
-          <p:nvPr/>
-        </p:nvSpPr>
-        <p:spPr>
-          <a:xfrm>
-            <a:off x="522922" y="2682716"/>
-            <a:ext cx="879062" cy="167640"/>
-          </a:xfrm>
-          <a:prstGeom prst="rect">
-            <a:avLst/>
-          </a:prstGeom>
-          <a:noFill/>
-          <a:ln>
-            <a:noFill/>
-          </a:ln>
-        </p:spPr>
-        <p:txBody>
-          <a:bodyPr wrap="none" lIns="0" tIns="0" rIns="0" bIns="0" anchor="t" anchorCtr="0">
-            <a:spAutoFit/>
-          </a:bodyPr>
-          <a:lstStyle/>
-          <a:p>
-            <a:pPr algn="l"/>
-            <a:r>
-              <a:rPr lang="zh-CN" sz="825" dirty="0">
-                <a:solidFill>
-                  <a:srgbClr val="1A1A1A"/>
-                </a:solidFill>
-                <a:latin typeface="Arial"/>
-                <a:ea typeface="Microsoft YaHei"/>
-                <a:cs typeface="Arial"/>
-              </a:rPr>
-              <a:t>before each call</a:t>
-            </a:r>
-          </a:p>
-        </p:txBody>
-      </p:sp>
-      <p:sp>
-        <p:nvSpPr>
-          <p:cNvPr id="38" name="TextBox 38"/>
-          <p:cNvSpPr txBox="1"/>
-          <p:nvPr/>
-        </p:nvSpPr>
-        <p:spPr>
-          <a:xfrm>
-            <a:off x="522922" y="2901791"/>
-            <a:ext cx="1335619" cy="167640"/>
-          </a:xfrm>
-          <a:prstGeom prst="rect">
-            <a:avLst/>
-          </a:prstGeom>
-          <a:noFill/>
-          <a:ln>
-            <a:noFill/>
-          </a:ln>
-        </p:spPr>
-        <p:txBody>
-          <a:bodyPr wrap="none" lIns="0" tIns="0" rIns="0" bIns="0" anchor="t" anchorCtr="0">
-            <a:spAutoFit/>
-          </a:bodyPr>
-          <a:lstStyle/>
-          <a:p>
-            <a:pPr algn="l"/>
-            <a:r>
-              <a:rPr lang="zh-CN" sz="825" dirty="0">
-                <a:solidFill>
-                  <a:srgbClr val="555555"/>
-                </a:solidFill>
-                <a:latin typeface="Arial"/>
-                <a:ea typeface="Microsoft YaHei"/>
-                <a:cs typeface="Arial"/>
-              </a:rPr>
-              <a:t>● Specialty &amp; patient mix</a:t>
-            </a:r>
-          </a:p>
-        </p:txBody>
-      </p:sp>
-      <p:sp>
-        <p:nvSpPr>
-          <p:cNvPr id="39" name="TextBox 39"/>
-          <p:cNvSpPr txBox="1"/>
-          <p:nvPr/>
-        </p:nvSpPr>
-        <p:spPr>
-          <a:xfrm>
-            <a:off x="522922" y="3073241"/>
-            <a:ext cx="1489639" cy="167640"/>
-          </a:xfrm>
-          <a:prstGeom prst="rect">
-            <a:avLst/>
-          </a:prstGeom>
-          <a:noFill/>
-          <a:ln>
-            <a:noFill/>
-          </a:ln>
-        </p:spPr>
-        <p:txBody>
-          <a:bodyPr wrap="none" lIns="0" tIns="0" rIns="0" bIns="0" anchor="t" anchorCtr="0">
-            <a:spAutoFit/>
-          </a:bodyPr>
-          <a:lstStyle/>
-          <a:p>
-            <a:pPr algn="l"/>
-            <a:r>
-              <a:rPr lang="zh-CN" sz="825" dirty="0">
-                <a:solidFill>
-                  <a:srgbClr val="555555"/>
-                </a:solidFill>
-                <a:latin typeface="Arial"/>
-                <a:ea typeface="Microsoft YaHei"/>
-                <a:cs typeface="Arial"/>
-              </a:rPr>
-              <a:t>● Current prescribing habit</a:t>
-            </a:r>
-          </a:p>
-        </p:txBody>
-      </p:sp>
-      <p:sp>
-        <p:nvSpPr>
-          <p:cNvPr id="40" name="TextBox 40"/>
-          <p:cNvSpPr txBox="1"/>
-          <p:nvPr/>
-        </p:nvSpPr>
-        <p:spPr>
-          <a:xfrm>
-            <a:off x="522922" y="3244691"/>
-            <a:ext cx="1181600" cy="167640"/>
-          </a:xfrm>
-          <a:prstGeom prst="rect">
-            <a:avLst/>
-          </a:prstGeom>
-          <a:noFill/>
-          <a:ln>
-            <a:noFill/>
-          </a:ln>
-        </p:spPr>
-        <p:txBody>
-          <a:bodyPr wrap="none" lIns="0" tIns="0" rIns="0" bIns="0" anchor="t" anchorCtr="0">
-            <a:spAutoFit/>
-          </a:bodyPr>
-          <a:lstStyle/>
-          <a:p>
-            <a:pPr algn="l"/>
-            <a:r>
-              <a:rPr lang="zh-CN" sz="825" dirty="0">
-                <a:solidFill>
-                  <a:srgbClr val="555555"/>
-                </a:solidFill>
-                <a:latin typeface="Arial"/>
-                <a:ea typeface="Microsoft YaHei"/>
-                <a:cs typeface="Arial"/>
-              </a:rPr>
-              <a:t>● Unmet clinical needs</a:t>
-            </a:r>
-          </a:p>
-        </p:txBody>
-      </p:sp>
-      <p:sp>
-        <p:nvSpPr>
-          <p:cNvPr id="41" name="TextBox 41"/>
-          <p:cNvSpPr txBox="1"/>
-          <p:nvPr/>
-        </p:nvSpPr>
-        <p:spPr>
-          <a:xfrm>
-            <a:off x="522922" y="3416141"/>
-            <a:ext cx="1236607" cy="167640"/>
-          </a:xfrm>
-          <a:prstGeom prst="rect">
-            <a:avLst/>
-          </a:prstGeom>
-          <a:noFill/>
-          <a:ln>
-            <a:noFill/>
-          </a:ln>
-        </p:spPr>
-        <p:txBody>
-          <a:bodyPr wrap="none" lIns="0" tIns="0" rIns="0" bIns="0" anchor="t" anchorCtr="0">
-            <a:spAutoFit/>
-          </a:bodyPr>
-          <a:lstStyle/>
-          <a:p>
-            <a:pPr algn="l"/>
-            <a:r>
-              <a:rPr lang="zh-CN" sz="825" dirty="0">
-                <a:solidFill>
-                  <a:srgbClr val="555555"/>
-                </a:solidFill>
-                <a:latin typeface="Arial"/>
-                <a:ea typeface="Microsoft YaHei"/>
-                <a:cs typeface="Arial"/>
-              </a:rPr>
-              <a:t>● Gate-keeper &amp; timing</a:t>
-            </a:r>
-          </a:p>
-        </p:txBody>
-      </p:sp>
-      <p:sp>
-        <p:nvSpPr>
-          <p:cNvPr id="42" name="TextBox 42"/>
-          <p:cNvSpPr txBox="1"/>
-          <p:nvPr/>
-        </p:nvSpPr>
-        <p:spPr>
-          <a:xfrm>
-            <a:off x="523875" y="3729038"/>
-            <a:ext cx="1389221" cy="152400"/>
-          </a:xfrm>
-          <a:prstGeom prst="rect">
-            <a:avLst/>
-          </a:prstGeom>
-          <a:noFill/>
-          <a:ln>
-            <a:noFill/>
-          </a:ln>
-        </p:spPr>
-        <p:txBody>
-          <a:bodyPr wrap="none" lIns="0" tIns="0" rIns="0" bIns="0" anchor="t" anchorCtr="0">
-            <a:spAutoFit/>
-          </a:bodyPr>
-          <a:lstStyle/>
-          <a:p>
-            <a:pPr algn="l"/>
-            <a:r>
-              <a:rPr lang="zh-CN" sz="750" i="1" dirty="0">
-                <a:solidFill>
-                  <a:srgbClr val="888888"/>
-                </a:solidFill>
-                <a:latin typeface="Arial"/>
-                <a:ea typeface="Microsoft YaHei"/>
-                <a:cs typeface="Arial"/>
-              </a:rPr>
-              <a:t>"Prepared MR = trusted MR"</a:t>
-            </a:r>
-          </a:p>
-        </p:txBody>
-      </p:sp>
-      <p:sp>
-        <p:nvSpPr>
-          <p:cNvPr id="43" name="Rectangle 43"/>
-          <p:cNvSpPr/>
-          <p:nvPr/>
-        </p:nvSpPr>
-        <p:spPr>
-          <a:xfrm>
-            <a:off x="2552700" y="2171700"/>
-            <a:ext cx="2057400" cy="1771650"/>
-          </a:xfrm>
-          <a:prstGeom prst="roundRect">
-            <a:avLst>
-              <a:gd name="adj" fmla="val 4301"/>
-            </a:avLst>
-          </a:prstGeom>
-          <a:solidFill>
-            <a:srgbClr val="FFFFFF"/>
-          </a:solidFill>
-          <a:ln w="9525">
-            <a:solidFill>
-              <a:srgbClr val="E0E0E0"/>
-            </a:solidFill>
-          </a:ln>
-          <a:effectLst>
-            <a:outerShdw blurRad="76200" dist="19050" dir="5400000" algn="ctr" rotWithShape="0">
-              <a:srgbClr val="000000">
-                <a:alpha val="5250"/>
-              </a:srgbClr>
-            </a:outerShdw>
-          </a:effectLst>
-        </p:spPr>
-      </p:sp>
-      <p:sp>
-        <p:nvSpPr>
-          <p:cNvPr id="44" name="Rectangle 44"/>
-          <p:cNvSpPr/>
-          <p:nvPr/>
-        </p:nvSpPr>
-        <p:spPr>
-          <a:xfrm>
-            <a:off x="2552700" y="2171700"/>
-            <a:ext cx="2057400" cy="38100"/>
-          </a:xfrm>
-          <a:prstGeom prst="roundRect">
-            <a:avLst>
-              <a:gd name="adj" fmla="val 50000"/>
-            </a:avLst>
-          </a:prstGeom>
-          <a:solidFill>
-            <a:srgbClr val="AE232F"/>
-          </a:solidFill>
-          <a:ln>
-            <a:noFill/>
-          </a:ln>
-        </p:spPr>
-      </p:sp>
-      <p:sp>
-        <p:nvSpPr>
-          <p:cNvPr id="45" name="TextBox 45"/>
-          <p:cNvSpPr txBox="1"/>
-          <p:nvPr/>
-        </p:nvSpPr>
-        <p:spPr>
-          <a:xfrm>
-            <a:off x="3308487" y="2322195"/>
-            <a:ext cx="545825" cy="182880"/>
-          </a:xfrm>
-          <a:prstGeom prst="rect">
-            <a:avLst/>
-          </a:prstGeom>
-          <a:noFill/>
-          <a:ln>
-            <a:noFill/>
-          </a:ln>
-        </p:spPr>
-        <p:txBody>
-          <a:bodyPr wrap="none" lIns="0" tIns="0" rIns="0" bIns="0" anchor="t" anchorCtr="0">
-            <a:spAutoFit/>
-          </a:bodyPr>
-          <a:lstStyle/>
-          <a:p>
-            <a:pPr algn="ctr"/>
-            <a:r>
-              <a:rPr lang="zh-CN" sz="900" b="1" dirty="0">
-                <a:solidFill>
-                  <a:srgbClr val="AE232F"/>
-                </a:solidFill>
-                <a:latin typeface="Arial"/>
-                <a:ea typeface="Microsoft YaHei"/>
-                <a:cs typeface="Arial"/>
-              </a:rPr>
-              <a:t>Discover</a:t>
-            </a:r>
-          </a:p>
-        </p:txBody>
-      </p:sp>
-      <p:sp>
-        <p:nvSpPr>
-          <p:cNvPr id="46" name="TextBox 46"/>
-          <p:cNvSpPr txBox="1"/>
-          <p:nvPr/>
-        </p:nvSpPr>
-        <p:spPr>
-          <a:xfrm>
-            <a:off x="2694622" y="2520791"/>
-            <a:ext cx="1445633" cy="167640"/>
-          </a:xfrm>
-          <a:prstGeom prst="rect">
-            <a:avLst/>
-          </a:prstGeom>
-          <a:noFill/>
-          <a:ln>
-            <a:noFill/>
-          </a:ln>
-        </p:spPr>
-        <p:txBody>
-          <a:bodyPr wrap="none" lIns="0" tIns="0" rIns="0" bIns="0" anchor="t" anchorCtr="0">
-            <a:spAutoFit/>
-          </a:bodyPr>
-          <a:lstStyle/>
-          <a:p>
-            <a:pPr algn="l"/>
-            <a:r>
-              <a:rPr lang="zh-CN" sz="825" dirty="0">
-                <a:solidFill>
-                  <a:srgbClr val="1A1A1A"/>
-                </a:solidFill>
-                <a:latin typeface="Arial"/>
-                <a:ea typeface="Microsoft YaHei"/>
-                <a:cs typeface="Arial"/>
-              </a:rPr>
-              <a:t>Open questions to surface</a:t>
-            </a:r>
-          </a:p>
-        </p:txBody>
-      </p:sp>
-      <p:sp>
-        <p:nvSpPr>
-          <p:cNvPr id="47" name="TextBox 47"/>
-          <p:cNvSpPr txBox="1"/>
-          <p:nvPr/>
-        </p:nvSpPr>
-        <p:spPr>
-          <a:xfrm>
-            <a:off x="2694622" y="2682716"/>
-            <a:ext cx="1126593" cy="167640"/>
-          </a:xfrm>
-          <a:prstGeom prst="rect">
-            <a:avLst/>
-          </a:prstGeom>
-          <a:noFill/>
-          <a:ln>
-            <a:noFill/>
-          </a:ln>
-        </p:spPr>
-        <p:txBody>
-          <a:bodyPr wrap="none" lIns="0" tIns="0" rIns="0" bIns="0" anchor="t" anchorCtr="0">
-            <a:spAutoFit/>
-          </a:bodyPr>
-          <a:lstStyle/>
-          <a:p>
-            <a:pPr algn="l"/>
-            <a:r>
-              <a:rPr lang="zh-CN" sz="825" dirty="0">
-                <a:solidFill>
-                  <a:srgbClr val="1A1A1A"/>
-                </a:solidFill>
-                <a:latin typeface="Arial"/>
-                <a:ea typeface="Microsoft YaHei"/>
-                <a:cs typeface="Arial"/>
-              </a:rPr>
-              <a:t>physician pain points</a:t>
-            </a:r>
-          </a:p>
-        </p:txBody>
-      </p:sp>
-      <p:sp>
-        <p:nvSpPr>
-          <p:cNvPr id="48" name="TextBox 48"/>
-          <p:cNvSpPr txBox="1"/>
-          <p:nvPr/>
-        </p:nvSpPr>
-        <p:spPr>
-          <a:xfrm>
-            <a:off x="2694622" y="2901791"/>
-            <a:ext cx="1390626" cy="167640"/>
-          </a:xfrm>
-          <a:prstGeom prst="rect">
-            <a:avLst/>
-          </a:prstGeom>
-          <a:noFill/>
-          <a:ln>
-            <a:noFill/>
-          </a:ln>
-        </p:spPr>
-        <p:txBody>
-          <a:bodyPr wrap="none" lIns="0" tIns="0" rIns="0" bIns="0" anchor="t" anchorCtr="0">
-            <a:spAutoFit/>
-          </a:bodyPr>
-          <a:lstStyle/>
-          <a:p>
-            <a:pPr algn="l"/>
-            <a:r>
-              <a:rPr lang="zh-CN" sz="825" dirty="0">
-                <a:solidFill>
-                  <a:srgbClr val="555555"/>
-                </a:solidFill>
-                <a:latin typeface="Arial"/>
-                <a:ea typeface="Microsoft YaHei"/>
-                <a:cs typeface="Arial"/>
-              </a:rPr>
-              <a:t>● "What challenges do you</a:t>
-            </a:r>
-          </a:p>
-        </p:txBody>
-      </p:sp>
-      <p:sp>
-        <p:nvSpPr>
-          <p:cNvPr id="49" name="TextBox 49"/>
-          <p:cNvSpPr txBox="1"/>
-          <p:nvPr/>
-        </p:nvSpPr>
-        <p:spPr>
-          <a:xfrm>
-            <a:off x="2694622" y="3054191"/>
-            <a:ext cx="1203603" cy="167640"/>
-          </a:xfrm>
-          <a:prstGeom prst="rect">
-            <a:avLst/>
-          </a:prstGeom>
-          <a:noFill/>
-          <a:ln>
-            <a:noFill/>
-          </a:ln>
-        </p:spPr>
-        <p:txBody>
-          <a:bodyPr wrap="none" lIns="0" tIns="0" rIns="0" bIns="0" anchor="t" anchorCtr="0">
-            <a:spAutoFit/>
-          </a:bodyPr>
-          <a:lstStyle/>
-          <a:p>
-            <a:pPr algn="l"/>
-            <a:r>
-              <a:rPr lang="zh-CN" sz="825" dirty="0">
-                <a:solidFill>
-                  <a:srgbClr val="555555"/>
-                </a:solidFill>
-                <a:latin typeface="Arial"/>
-                <a:ea typeface="Microsoft YaHei"/>
-                <a:cs typeface="Arial"/>
-              </a:rPr>
-              <a:t>face with VTE cases?"</a:t>
-            </a:r>
-          </a:p>
-        </p:txBody>
-      </p:sp>
-      <p:sp>
-        <p:nvSpPr>
-          <p:cNvPr id="50" name="TextBox 50"/>
-          <p:cNvSpPr txBox="1"/>
-          <p:nvPr/>
-        </p:nvSpPr>
-        <p:spPr>
-          <a:xfrm>
-            <a:off x="2694622" y="3225641"/>
-            <a:ext cx="1297114" cy="167640"/>
-          </a:xfrm>
-          <a:prstGeom prst="rect">
-            <a:avLst/>
-          </a:prstGeom>
-          <a:noFill/>
-          <a:ln>
-            <a:noFill/>
-          </a:ln>
-        </p:spPr>
-        <p:txBody>
-          <a:bodyPr wrap="none" lIns="0" tIns="0" rIns="0" bIns="0" anchor="t" anchorCtr="0">
-            <a:spAutoFit/>
-          </a:bodyPr>
-          <a:lstStyle/>
-          <a:p>
-            <a:pPr algn="l"/>
-            <a:r>
-              <a:rPr lang="zh-CN" sz="825" dirty="0">
-                <a:solidFill>
-                  <a:srgbClr val="555555"/>
-                </a:solidFill>
-                <a:latin typeface="Arial"/>
-                <a:ea typeface="Microsoft YaHei"/>
-                <a:cs typeface="Arial"/>
-              </a:rPr>
-              <a:t>● "How do you currently</a:t>
-            </a:r>
-          </a:p>
-        </p:txBody>
-      </p:sp>
-      <p:sp>
-        <p:nvSpPr>
-          <p:cNvPr id="51" name="TextBox 51"/>
-          <p:cNvSpPr txBox="1"/>
-          <p:nvPr/>
-        </p:nvSpPr>
-        <p:spPr>
-          <a:xfrm>
-            <a:off x="2694622" y="3378041"/>
-            <a:ext cx="1627156" cy="167640"/>
-          </a:xfrm>
-          <a:prstGeom prst="rect">
-            <a:avLst/>
-          </a:prstGeom>
-          <a:noFill/>
-          <a:ln>
-            <a:noFill/>
-          </a:ln>
-        </p:spPr>
-        <p:txBody>
-          <a:bodyPr wrap="none" lIns="0" tIns="0" rIns="0" bIns="0" anchor="t" anchorCtr="0">
-            <a:spAutoFit/>
-          </a:bodyPr>
-          <a:lstStyle/>
-          <a:p>
-            <a:pPr algn="l"/>
-            <a:r>
-              <a:rPr lang="zh-CN" sz="825" dirty="0">
-                <a:solidFill>
-                  <a:srgbClr val="555555"/>
-                </a:solidFill>
-                <a:latin typeface="Arial"/>
-                <a:ea typeface="Microsoft YaHei"/>
-                <a:cs typeface="Arial"/>
-              </a:rPr>
-              <a:t>manage post-op prophylaxis?"</a:t>
-            </a:r>
-          </a:p>
-        </p:txBody>
-      </p:sp>
-      <p:sp>
-        <p:nvSpPr>
-          <p:cNvPr id="52" name="TextBox 52"/>
-          <p:cNvSpPr txBox="1"/>
-          <p:nvPr/>
-        </p:nvSpPr>
-        <p:spPr>
-          <a:xfrm>
-            <a:off x="2695575" y="3729038"/>
-            <a:ext cx="1144191" cy="152400"/>
-          </a:xfrm>
-          <a:prstGeom prst="rect">
-            <a:avLst/>
-          </a:prstGeom>
-          <a:noFill/>
-          <a:ln>
-            <a:noFill/>
-          </a:ln>
-        </p:spPr>
-        <p:txBody>
-          <a:bodyPr wrap="none" lIns="0" tIns="0" rIns="0" bIns="0" anchor="t" anchorCtr="0">
-            <a:spAutoFit/>
-          </a:bodyPr>
-          <a:lstStyle/>
-          <a:p>
-            <a:pPr algn="l"/>
-            <a:r>
-              <a:rPr lang="zh-CN" sz="750" i="1" dirty="0">
-                <a:solidFill>
-                  <a:srgbClr val="888888"/>
-                </a:solidFill>
-                <a:latin typeface="Arial"/>
-                <a:ea typeface="Microsoft YaHei"/>
-                <a:cs typeface="Arial"/>
-              </a:rPr>
-              <a:t>"Listen 70%, talk 30%"</a:t>
-            </a:r>
-          </a:p>
-        </p:txBody>
-      </p:sp>
-      <p:sp>
-        <p:nvSpPr>
-          <p:cNvPr id="53" name="Rectangle 53"/>
-          <p:cNvSpPr/>
-          <p:nvPr/>
-        </p:nvSpPr>
-        <p:spPr>
-          <a:xfrm>
-            <a:off x="4724400" y="2171700"/>
-            <a:ext cx="2057400" cy="1771650"/>
-          </a:xfrm>
-          <a:prstGeom prst="roundRect">
-            <a:avLst>
-              <a:gd name="adj" fmla="val 4301"/>
-            </a:avLst>
-          </a:prstGeom>
-          <a:solidFill>
-            <a:srgbClr val="FFFFFF"/>
-          </a:solidFill>
-          <a:ln w="9525">
-            <a:solidFill>
-              <a:srgbClr val="E0E0E0"/>
-            </a:solidFill>
-          </a:ln>
-          <a:effectLst>
-            <a:outerShdw blurRad="76200" dist="19050" dir="5400000" algn="ctr" rotWithShape="0">
-              <a:srgbClr val="000000">
-                <a:alpha val="5250"/>
-              </a:srgbClr>
-            </a:outerShdw>
-          </a:effectLst>
-        </p:spPr>
-      </p:sp>
-      <p:sp>
-        <p:nvSpPr>
-          <p:cNvPr id="54" name="Rectangle 54"/>
-          <p:cNvSpPr/>
-          <p:nvPr/>
-        </p:nvSpPr>
-        <p:spPr>
-          <a:xfrm>
-            <a:off x="4724400" y="2171700"/>
-            <a:ext cx="2057400" cy="38100"/>
-          </a:xfrm>
-          <a:prstGeom prst="roundRect">
-            <a:avLst>
-              <a:gd name="adj" fmla="val 50000"/>
-            </a:avLst>
-          </a:prstGeom>
-          <a:solidFill>
-            <a:srgbClr val="AE232F"/>
-          </a:solidFill>
-          <a:ln>
-            <a:noFill/>
-          </a:ln>
-        </p:spPr>
-      </p:sp>
-      <p:sp>
-        <p:nvSpPr>
-          <p:cNvPr id="55" name="TextBox 55"/>
-          <p:cNvSpPr txBox="1"/>
-          <p:nvPr/>
-        </p:nvSpPr>
-        <p:spPr>
-          <a:xfrm>
-            <a:off x="5480187" y="2322195"/>
-            <a:ext cx="545825" cy="182880"/>
-          </a:xfrm>
-          <a:prstGeom prst="rect">
-            <a:avLst/>
-          </a:prstGeom>
-          <a:noFill/>
-          <a:ln>
-            <a:noFill/>
-          </a:ln>
-        </p:spPr>
-        <p:txBody>
-          <a:bodyPr wrap="none" lIns="0" tIns="0" rIns="0" bIns="0" anchor="t" anchorCtr="0">
-            <a:spAutoFit/>
-          </a:bodyPr>
-          <a:lstStyle/>
-          <a:p>
-            <a:pPr algn="ctr"/>
-            <a:r>
-              <a:rPr lang="zh-CN" sz="900" b="1" dirty="0">
-                <a:solidFill>
-                  <a:srgbClr val="AE232F"/>
-                </a:solidFill>
-                <a:latin typeface="Arial"/>
-                <a:ea typeface="Microsoft YaHei"/>
-                <a:cs typeface="Arial"/>
-              </a:rPr>
-              <a:t>Activate</a:t>
-            </a:r>
-          </a:p>
-        </p:txBody>
-      </p:sp>
-      <p:sp>
-        <p:nvSpPr>
-          <p:cNvPr id="56" name="TextBox 56"/>
-          <p:cNvSpPr txBox="1"/>
-          <p:nvPr/>
-        </p:nvSpPr>
-        <p:spPr>
-          <a:xfrm>
-            <a:off x="4866322" y="2520791"/>
-            <a:ext cx="1302615" cy="167640"/>
-          </a:xfrm>
-          <a:prstGeom prst="rect">
-            <a:avLst/>
-          </a:prstGeom>
-          <a:noFill/>
-          <a:ln>
-            <a:noFill/>
-          </a:ln>
-        </p:spPr>
-        <p:txBody>
-          <a:bodyPr wrap="none" lIns="0" tIns="0" rIns="0" bIns="0" anchor="t" anchorCtr="0">
-            <a:spAutoFit/>
-          </a:bodyPr>
-          <a:lstStyle/>
-          <a:p>
-            <a:pPr algn="l"/>
-            <a:r>
-              <a:rPr lang="zh-CN" sz="825" dirty="0">
-                <a:solidFill>
-                  <a:srgbClr val="1A1A1A"/>
-                </a:solidFill>
-                <a:latin typeface="Arial"/>
-                <a:ea typeface="Microsoft YaHei"/>
-                <a:cs typeface="Arial"/>
-              </a:rPr>
-              <a:t>Connect evidence to the</a:t>
-            </a:r>
-          </a:p>
-        </p:txBody>
-      </p:sp>
-      <p:sp>
-        <p:nvSpPr>
-          <p:cNvPr id="57" name="TextBox 57"/>
-          <p:cNvSpPr txBox="1"/>
-          <p:nvPr/>
-        </p:nvSpPr>
-        <p:spPr>
-          <a:xfrm>
-            <a:off x="4866322" y="2682716"/>
-            <a:ext cx="1368623" cy="167640"/>
-          </a:xfrm>
-          <a:prstGeom prst="rect">
-            <a:avLst/>
-          </a:prstGeom>
-          <a:noFill/>
-          <a:ln>
-            <a:noFill/>
-          </a:ln>
-        </p:spPr>
-        <p:txBody>
-          <a:bodyPr wrap="none" lIns="0" tIns="0" rIns="0" bIns="0" anchor="t" anchorCtr="0">
-            <a:spAutoFit/>
-          </a:bodyPr>
-          <a:lstStyle/>
-          <a:p>
-            <a:pPr algn="l"/>
-            <a:r>
-              <a:rPr lang="zh-CN" sz="825" dirty="0">
-                <a:solidFill>
-                  <a:srgbClr val="1A1A1A"/>
-                </a:solidFill>
-                <a:latin typeface="Arial"/>
-                <a:ea typeface="Microsoft YaHei"/>
-                <a:cs typeface="Arial"/>
-              </a:rPr>
-              <a:t>physician's specific need</a:t>
-            </a:r>
-          </a:p>
-        </p:txBody>
-      </p:sp>
-      <p:sp>
-        <p:nvSpPr>
-          <p:cNvPr id="58" name="TextBox 58"/>
-          <p:cNvSpPr txBox="1"/>
-          <p:nvPr/>
-        </p:nvSpPr>
-        <p:spPr>
-          <a:xfrm>
-            <a:off x="4866322" y="2901791"/>
-            <a:ext cx="1308116" cy="167640"/>
-          </a:xfrm>
-          <a:prstGeom prst="rect">
-            <a:avLst/>
-          </a:prstGeom>
-          <a:noFill/>
-          <a:ln>
-            <a:noFill/>
-          </a:ln>
-        </p:spPr>
-        <p:txBody>
-          <a:bodyPr wrap="none" lIns="0" tIns="0" rIns="0" bIns="0" anchor="t" anchorCtr="0">
-            <a:spAutoFit/>
-          </a:bodyPr>
-          <a:lstStyle/>
-          <a:p>
-            <a:pPr algn="l"/>
-            <a:r>
-              <a:rPr lang="zh-CN" sz="825" dirty="0">
-                <a:solidFill>
-                  <a:srgbClr val="555555"/>
-                </a:solidFill>
-                <a:latin typeface="Arial"/>
-                <a:ea typeface="Microsoft YaHei"/>
-                <a:cs typeface="Arial"/>
-              </a:rPr>
-              <a:t>● Lead with clinical data</a:t>
-            </a:r>
-          </a:p>
-        </p:txBody>
-      </p:sp>
-      <p:sp>
-        <p:nvSpPr>
-          <p:cNvPr id="59" name="TextBox 59"/>
-          <p:cNvSpPr txBox="1"/>
-          <p:nvPr/>
-        </p:nvSpPr>
-        <p:spPr>
-          <a:xfrm>
-            <a:off x="4866322" y="3073241"/>
-            <a:ext cx="1115592" cy="167640"/>
-          </a:xfrm>
-          <a:prstGeom prst="rect">
-            <a:avLst/>
-          </a:prstGeom>
-          <a:noFill/>
-          <a:ln>
-            <a:noFill/>
-          </a:ln>
-        </p:spPr>
-        <p:txBody>
-          <a:bodyPr wrap="none" lIns="0" tIns="0" rIns="0" bIns="0" anchor="t" anchorCtr="0">
-            <a:spAutoFit/>
-          </a:bodyPr>
-          <a:lstStyle/>
-          <a:p>
-            <a:pPr algn="l"/>
-            <a:r>
-              <a:rPr lang="zh-CN" sz="825" dirty="0">
-                <a:solidFill>
-                  <a:srgbClr val="555555"/>
-                </a:solidFill>
-                <a:latin typeface="Arial"/>
-                <a:ea typeface="Microsoft YaHei"/>
-                <a:cs typeface="Arial"/>
-              </a:rPr>
-              <a:t>(ESSENCE / SYNERGY)</a:t>
-            </a:r>
-          </a:p>
-        </p:txBody>
-      </p:sp>
-      <p:sp>
-        <p:nvSpPr>
-          <p:cNvPr id="60" name="TextBox 60"/>
-          <p:cNvSpPr txBox="1"/>
-          <p:nvPr/>
-        </p:nvSpPr>
-        <p:spPr>
-          <a:xfrm>
-            <a:off x="4866322" y="3244691"/>
-            <a:ext cx="1396127" cy="167640"/>
-          </a:xfrm>
-          <a:prstGeom prst="rect">
-            <a:avLst/>
-          </a:prstGeom>
-          <a:noFill/>
-          <a:ln>
-            <a:noFill/>
-          </a:ln>
-        </p:spPr>
-        <p:txBody>
-          <a:bodyPr wrap="none" lIns="0" tIns="0" rIns="0" bIns="0" anchor="t" anchorCtr="0">
-            <a:spAutoFit/>
-          </a:bodyPr>
-          <a:lstStyle/>
-          <a:p>
-            <a:pPr algn="l"/>
-            <a:r>
-              <a:rPr lang="zh-CN" sz="825" dirty="0">
-                <a:solidFill>
-                  <a:srgbClr val="555555"/>
-                </a:solidFill>
-                <a:latin typeface="Arial"/>
-                <a:ea typeface="Microsoft YaHei"/>
-                <a:cs typeface="Arial"/>
-              </a:rPr>
-              <a:t>● Handle objections calmly</a:t>
-            </a:r>
-          </a:p>
-        </p:txBody>
-      </p:sp>
-      <p:sp>
-        <p:nvSpPr>
-          <p:cNvPr id="61" name="TextBox 61"/>
-          <p:cNvSpPr txBox="1"/>
-          <p:nvPr/>
-        </p:nvSpPr>
-        <p:spPr>
-          <a:xfrm>
-            <a:off x="4866322" y="3416141"/>
-            <a:ext cx="1484138" cy="167640"/>
-          </a:xfrm>
-          <a:prstGeom prst="rect">
-            <a:avLst/>
-          </a:prstGeom>
-          <a:noFill/>
-          <a:ln>
-            <a:noFill/>
-          </a:ln>
-        </p:spPr>
-        <p:txBody>
-          <a:bodyPr wrap="none" lIns="0" tIns="0" rIns="0" bIns="0" anchor="t" anchorCtr="0">
-            <a:spAutoFit/>
-          </a:bodyPr>
-          <a:lstStyle/>
-          <a:p>
-            <a:pPr algn="l"/>
-            <a:r>
-              <a:rPr lang="zh-CN" sz="825" dirty="0">
-                <a:solidFill>
-                  <a:srgbClr val="555555"/>
-                </a:solidFill>
-                <a:latin typeface="Arial"/>
-                <a:ea typeface="Microsoft YaHei"/>
-                <a:cs typeface="Arial"/>
-              </a:rPr>
-              <a:t>● Use real patient examples</a:t>
-            </a:r>
-          </a:p>
-        </p:txBody>
-      </p:sp>
-      <p:sp>
-        <p:nvSpPr>
-          <p:cNvPr id="62" name="TextBox 62"/>
-          <p:cNvSpPr txBox="1"/>
-          <p:nvPr/>
-        </p:nvSpPr>
-        <p:spPr>
-          <a:xfrm>
-            <a:off x="4867275" y="3729038"/>
-            <a:ext cx="1254204" cy="152400"/>
-          </a:xfrm>
-          <a:prstGeom prst="rect">
-            <a:avLst/>
-          </a:prstGeom>
-          <a:noFill/>
-          <a:ln>
-            <a:noFill/>
-          </a:ln>
-        </p:spPr>
-        <p:txBody>
-          <a:bodyPr wrap="none" lIns="0" tIns="0" rIns="0" bIns="0" anchor="t" anchorCtr="0">
-            <a:spAutoFit/>
-          </a:bodyPr>
-          <a:lstStyle/>
-          <a:p>
-            <a:pPr algn="l"/>
-            <a:r>
-              <a:rPr lang="zh-CN" sz="750" i="1" dirty="0">
-                <a:solidFill>
-                  <a:srgbClr val="888888"/>
-                </a:solidFill>
-                <a:latin typeface="Arial"/>
-                <a:ea typeface="Microsoft YaHei"/>
-                <a:cs typeface="Arial"/>
-              </a:rPr>
-              <a:t>"Science + empathy wins"</a:t>
-            </a:r>
-          </a:p>
-        </p:txBody>
-      </p:sp>
-      <p:sp>
-        <p:nvSpPr>
-          <p:cNvPr id="63" name="Rectangle 63"/>
-          <p:cNvSpPr/>
-          <p:nvPr/>
-        </p:nvSpPr>
-        <p:spPr>
-          <a:xfrm>
-            <a:off x="6896100" y="2171700"/>
-            <a:ext cx="2057400" cy="1771650"/>
-          </a:xfrm>
-          <a:prstGeom prst="roundRect">
-            <a:avLst>
-              <a:gd name="adj" fmla="val 4301"/>
-            </a:avLst>
-          </a:prstGeom>
-          <a:solidFill>
-            <a:srgbClr val="FFFFFF"/>
-          </a:solidFill>
-          <a:ln w="9525">
-            <a:solidFill>
-              <a:srgbClr val="E0E0E0"/>
-            </a:solidFill>
-          </a:ln>
-          <a:effectLst>
-            <a:outerShdw blurRad="76200" dist="19050" dir="5400000" algn="ctr" rotWithShape="0">
-              <a:srgbClr val="000000">
-                <a:alpha val="5250"/>
-              </a:srgbClr>
-            </a:outerShdw>
-          </a:effectLst>
-        </p:spPr>
-      </p:sp>
-      <p:sp>
-        <p:nvSpPr>
-          <p:cNvPr id="64" name="Rectangle 64"/>
-          <p:cNvSpPr/>
-          <p:nvPr/>
-        </p:nvSpPr>
-        <p:spPr>
-          <a:xfrm>
-            <a:off x="6896100" y="2171700"/>
-            <a:ext cx="2057400" cy="38100"/>
-          </a:xfrm>
-          <a:prstGeom prst="roundRect">
-            <a:avLst>
-              <a:gd name="adj" fmla="val 50000"/>
-            </a:avLst>
-          </a:prstGeom>
-          <a:solidFill>
-            <a:srgbClr val="AE232F"/>
-          </a:solidFill>
-          <a:ln>
-            <a:noFill/>
-          </a:ln>
-        </p:spPr>
-      </p:sp>
-      <p:sp>
-        <p:nvSpPr>
-          <p:cNvPr id="65" name="TextBox 65"/>
-          <p:cNvSpPr txBox="1"/>
-          <p:nvPr/>
-        </p:nvSpPr>
-        <p:spPr>
-          <a:xfrm>
-            <a:off x="7686542" y="2322195"/>
-            <a:ext cx="476517" cy="182880"/>
-          </a:xfrm>
-          <a:prstGeom prst="rect">
-            <a:avLst/>
-          </a:prstGeom>
-          <a:noFill/>
-          <a:ln>
-            <a:noFill/>
-          </a:ln>
-        </p:spPr>
-        <p:txBody>
-          <a:bodyPr wrap="none" lIns="0" tIns="0" rIns="0" bIns="0" anchor="t" anchorCtr="0">
-            <a:spAutoFit/>
-          </a:bodyPr>
-          <a:lstStyle/>
-          <a:p>
-            <a:pPr algn="ctr"/>
-            <a:r>
-              <a:rPr lang="zh-CN" sz="900" b="1" dirty="0">
-                <a:solidFill>
-                  <a:srgbClr val="AE232F"/>
-                </a:solidFill>
-                <a:latin typeface="Arial"/>
-                <a:ea typeface="Microsoft YaHei"/>
-                <a:cs typeface="Arial"/>
-              </a:rPr>
-              <a:t>Project</a:t>
-            </a:r>
-          </a:p>
-        </p:txBody>
-      </p:sp>
-      <p:sp>
-        <p:nvSpPr>
-          <p:cNvPr id="66" name="TextBox 66"/>
-          <p:cNvSpPr txBox="1"/>
-          <p:nvPr/>
-        </p:nvSpPr>
-        <p:spPr>
-          <a:xfrm>
-            <a:off x="7038022" y="2520791"/>
-            <a:ext cx="1418130" cy="167640"/>
-          </a:xfrm>
-          <a:prstGeom prst="rect">
-            <a:avLst/>
-          </a:prstGeom>
-          <a:noFill/>
-          <a:ln>
-            <a:noFill/>
-          </a:ln>
-        </p:spPr>
-        <p:txBody>
-          <a:bodyPr wrap="none" lIns="0" tIns="0" rIns="0" bIns="0" anchor="t" anchorCtr="0">
-            <a:spAutoFit/>
-          </a:bodyPr>
-          <a:lstStyle/>
-          <a:p>
-            <a:pPr algn="l"/>
-            <a:r>
-              <a:rPr lang="zh-CN" sz="825" dirty="0">
-                <a:solidFill>
-                  <a:srgbClr val="1A1A1A"/>
-                </a:solidFill>
-                <a:latin typeface="Arial"/>
-                <a:ea typeface="Microsoft YaHei"/>
-                <a:cs typeface="Arial"/>
-              </a:rPr>
-              <a:t>Paint the patient outcome</a:t>
-            </a:r>
-          </a:p>
-        </p:txBody>
-      </p:sp>
-      <p:sp>
-        <p:nvSpPr>
-          <p:cNvPr id="67" name="TextBox 67"/>
-          <p:cNvSpPr txBox="1"/>
-          <p:nvPr/>
-        </p:nvSpPr>
-        <p:spPr>
-          <a:xfrm>
-            <a:off x="7038022" y="2682716"/>
-            <a:ext cx="1368623" cy="167640"/>
-          </a:xfrm>
-          <a:prstGeom prst="rect">
-            <a:avLst/>
-          </a:prstGeom>
-          <a:noFill/>
-          <a:ln>
-            <a:noFill/>
-          </a:ln>
-        </p:spPr>
-        <p:txBody>
-          <a:bodyPr wrap="none" lIns="0" tIns="0" rIns="0" bIns="0" anchor="t" anchorCtr="0">
-            <a:spAutoFit/>
-          </a:bodyPr>
-          <a:lstStyle/>
-          <a:p>
-            <a:pPr algn="l"/>
-            <a:r>
-              <a:rPr lang="zh-CN" sz="825" dirty="0">
-                <a:solidFill>
-                  <a:srgbClr val="1A1A1A"/>
-                </a:solidFill>
-                <a:latin typeface="Arial"/>
-                <a:ea typeface="Microsoft YaHei"/>
-                <a:cs typeface="Arial"/>
-              </a:rPr>
-              <a:t>picture for the physician</a:t>
-            </a:r>
-          </a:p>
-        </p:txBody>
-      </p:sp>
-      <p:sp>
-        <p:nvSpPr>
-          <p:cNvPr id="68" name="TextBox 68"/>
-          <p:cNvSpPr txBox="1"/>
-          <p:nvPr/>
-        </p:nvSpPr>
-        <p:spPr>
-          <a:xfrm>
-            <a:off x="7038022" y="2901791"/>
-            <a:ext cx="1632656" cy="167640"/>
-          </a:xfrm>
-          <a:prstGeom prst="rect">
-            <a:avLst/>
-          </a:prstGeom>
-          <a:noFill/>
-          <a:ln>
-            <a:noFill/>
-          </a:ln>
-        </p:spPr>
-        <p:txBody>
-          <a:bodyPr wrap="none" lIns="0" tIns="0" rIns="0" bIns="0" anchor="t" anchorCtr="0">
-            <a:spAutoFit/>
-          </a:bodyPr>
-          <a:lstStyle/>
-          <a:p>
-            <a:pPr algn="l"/>
-            <a:r>
-              <a:rPr lang="zh-CN" sz="825" dirty="0">
-                <a:solidFill>
-                  <a:srgbClr val="555555"/>
-                </a:solidFill>
-                <a:latin typeface="Arial"/>
-                <a:ea typeface="Microsoft YaHei"/>
-                <a:cs typeface="Arial"/>
-              </a:rPr>
-              <a:t>● "Your DVT patient goes home</a:t>
-            </a:r>
-          </a:p>
-        </p:txBody>
-      </p:sp>
-      <p:sp>
-        <p:nvSpPr>
-          <p:cNvPr id="69" name="TextBox 69"/>
-          <p:cNvSpPr txBox="1"/>
-          <p:nvPr/>
-        </p:nvSpPr>
-        <p:spPr>
-          <a:xfrm>
-            <a:off x="7038022" y="3054191"/>
-            <a:ext cx="1236607" cy="167640"/>
-          </a:xfrm>
-          <a:prstGeom prst="rect">
-            <a:avLst/>
-          </a:prstGeom>
-          <a:noFill/>
-          <a:ln>
-            <a:noFill/>
-          </a:ln>
-        </p:spPr>
-        <p:txBody>
-          <a:bodyPr wrap="none" lIns="0" tIns="0" rIns="0" bIns="0" anchor="t" anchorCtr="0">
-            <a:spAutoFit/>
-          </a:bodyPr>
-          <a:lstStyle/>
-          <a:p>
-            <a:pPr algn="l"/>
-            <a:r>
-              <a:rPr lang="zh-CN" sz="825" dirty="0">
-                <a:solidFill>
-                  <a:srgbClr val="555555"/>
-                </a:solidFill>
-                <a:latin typeface="Arial"/>
-                <a:ea typeface="Microsoft YaHei"/>
-                <a:cs typeface="Arial"/>
-              </a:rPr>
-              <a:t>sooner with SC dosing"</a:t>
-            </a:r>
-          </a:p>
-        </p:txBody>
-      </p:sp>
-      <p:sp>
-        <p:nvSpPr>
-          <p:cNvPr id="70" name="TextBox 70"/>
-          <p:cNvSpPr txBox="1"/>
-          <p:nvPr/>
-        </p:nvSpPr>
-        <p:spPr>
-          <a:xfrm>
-            <a:off x="7038022" y="3225641"/>
-            <a:ext cx="1654659" cy="167640"/>
-          </a:xfrm>
-          <a:prstGeom prst="rect">
-            <a:avLst/>
-          </a:prstGeom>
-          <a:noFill/>
-          <a:ln>
-            <a:noFill/>
-          </a:ln>
-        </p:spPr>
-        <p:txBody>
-          <a:bodyPr wrap="none" lIns="0" tIns="0" rIns="0" bIns="0" anchor="t" anchorCtr="0">
-            <a:spAutoFit/>
-          </a:bodyPr>
-          <a:lstStyle/>
-          <a:p>
-            <a:pPr algn="l"/>
-            <a:r>
-              <a:rPr lang="zh-CN" sz="825" dirty="0">
-                <a:solidFill>
-                  <a:srgbClr val="555555"/>
-                </a:solidFill>
-                <a:latin typeface="Arial"/>
-                <a:ea typeface="Microsoft YaHei"/>
-                <a:cs typeface="Arial"/>
-              </a:rPr>
-              <a:t>● Connect to their clinical goal</a:t>
-            </a:r>
-          </a:p>
-        </p:txBody>
-      </p:sp>
-      <p:sp>
-        <p:nvSpPr>
-          <p:cNvPr id="71" name="TextBox 71"/>
-          <p:cNvSpPr txBox="1"/>
-          <p:nvPr/>
-        </p:nvSpPr>
-        <p:spPr>
-          <a:xfrm>
-            <a:off x="7038022" y="3397091"/>
-            <a:ext cx="1484138" cy="167640"/>
-          </a:xfrm>
-          <a:prstGeom prst="rect">
-            <a:avLst/>
-          </a:prstGeom>
-          <a:noFill/>
-          <a:ln>
-            <a:noFill/>
-          </a:ln>
-        </p:spPr>
-        <p:txBody>
-          <a:bodyPr wrap="none" lIns="0" tIns="0" rIns="0" bIns="0" anchor="t" anchorCtr="0">
-            <a:spAutoFit/>
-          </a:bodyPr>
-          <a:lstStyle/>
-          <a:p>
-            <a:pPr algn="l"/>
-            <a:r>
-              <a:rPr lang="zh-CN" sz="825" dirty="0">
-                <a:solidFill>
-                  <a:srgbClr val="555555"/>
-                </a:solidFill>
-                <a:latin typeface="Arial"/>
-                <a:ea typeface="Microsoft YaHei"/>
-                <a:cs typeface="Arial"/>
-              </a:rPr>
-              <a:t>● Make the benefit tangible</a:t>
-            </a:r>
-          </a:p>
-        </p:txBody>
-      </p:sp>
-      <p:sp>
-        <p:nvSpPr>
-          <p:cNvPr id="72" name="TextBox 72"/>
-          <p:cNvSpPr txBox="1"/>
-          <p:nvPr/>
-        </p:nvSpPr>
-        <p:spPr>
-          <a:xfrm>
-            <a:off x="7038975" y="3729038"/>
-            <a:ext cx="1169194" cy="152400"/>
-          </a:xfrm>
-          <a:prstGeom prst="rect">
-            <a:avLst/>
-          </a:prstGeom>
-          <a:noFill/>
-          <a:ln>
-            <a:noFill/>
-          </a:ln>
-        </p:spPr>
-        <p:txBody>
-          <a:bodyPr wrap="none" lIns="0" tIns="0" rIns="0" bIns="0" anchor="t" anchorCtr="0">
-            <a:spAutoFit/>
-          </a:bodyPr>
-          <a:lstStyle/>
-          <a:p>
-            <a:pPr algn="l"/>
-            <a:r>
-              <a:rPr lang="zh-CN" sz="750" i="1" dirty="0">
-                <a:solidFill>
-                  <a:srgbClr val="888888"/>
-                </a:solidFill>
-                <a:latin typeface="Arial"/>
-                <a:ea typeface="Microsoft YaHei"/>
-                <a:cs typeface="Arial"/>
-              </a:rPr>
-              <a:t>"Outcome storytelling"</a:t>
-            </a:r>
-          </a:p>
-        </p:txBody>
-      </p:sp>
-      <p:sp>
-        <p:nvSpPr>
-          <p:cNvPr id="73" name="Rectangle 73"/>
-          <p:cNvSpPr/>
-          <p:nvPr/>
-        </p:nvSpPr>
-        <p:spPr>
-          <a:xfrm>
-            <a:off x="9067800" y="2171700"/>
-            <a:ext cx="2743200" cy="1771650"/>
-          </a:xfrm>
-          <a:prstGeom prst="roundRect">
-            <a:avLst>
-              <a:gd name="adj" fmla="val 4301"/>
-            </a:avLst>
-          </a:prstGeom>
-          <a:solidFill>
-            <a:srgbClr val="FFFFFF"/>
-          </a:solidFill>
-          <a:ln w="9525">
-            <a:solidFill>
-              <a:srgbClr val="E0E0E0"/>
-            </a:solidFill>
-          </a:ln>
-          <a:effectLst>
-            <a:outerShdw blurRad="76200" dist="19050" dir="5400000" algn="ctr" rotWithShape="0">
-              <a:srgbClr val="000000">
-                <a:alpha val="5250"/>
-              </a:srgbClr>
-            </a:outerShdw>
-          </a:effectLst>
-        </p:spPr>
-      </p:sp>
-      <p:sp>
-        <p:nvSpPr>
-          <p:cNvPr id="74" name="Rectangle 74"/>
-          <p:cNvSpPr/>
-          <p:nvPr/>
-        </p:nvSpPr>
-        <p:spPr>
-          <a:xfrm>
-            <a:off x="9067800" y="2171700"/>
-            <a:ext cx="2743200" cy="38100"/>
-          </a:xfrm>
-          <a:prstGeom prst="roundRect">
-            <a:avLst>
-              <a:gd name="adj" fmla="val 50000"/>
-            </a:avLst>
-          </a:prstGeom>
-          <a:solidFill>
-            <a:srgbClr val="AE232F"/>
-          </a:solidFill>
-          <a:ln>
-            <a:noFill/>
-          </a:ln>
-        </p:spPr>
-      </p:sp>
-      <p:sp>
-        <p:nvSpPr>
-          <p:cNvPr id="75" name="TextBox 75"/>
-          <p:cNvSpPr txBox="1"/>
-          <p:nvPr/>
-        </p:nvSpPr>
-        <p:spPr>
-          <a:xfrm>
-            <a:off x="10169638" y="2322195"/>
-            <a:ext cx="539525" cy="182880"/>
-          </a:xfrm>
-          <a:prstGeom prst="rect">
-            <a:avLst/>
-          </a:prstGeom>
-          <a:noFill/>
-          <a:ln>
-            <a:noFill/>
-          </a:ln>
-        </p:spPr>
-        <p:txBody>
-          <a:bodyPr wrap="none" lIns="0" tIns="0" rIns="0" bIns="0" anchor="t" anchorCtr="0">
-            <a:spAutoFit/>
-          </a:bodyPr>
-          <a:lstStyle/>
-          <a:p>
-            <a:pPr algn="ctr"/>
-            <a:r>
-              <a:rPr lang="zh-CN" sz="900" b="1" dirty="0">
-                <a:solidFill>
-                  <a:srgbClr val="AE232F"/>
-                </a:solidFill>
-                <a:latin typeface="Arial"/>
-                <a:ea typeface="Microsoft YaHei"/>
-                <a:cs typeface="Arial"/>
-              </a:rPr>
-              <a:t>Tie Down</a:t>
-            </a:r>
-          </a:p>
-        </p:txBody>
-      </p:sp>
-      <p:sp>
-        <p:nvSpPr>
-          <p:cNvPr id="76" name="TextBox 76"/>
-          <p:cNvSpPr txBox="1"/>
-          <p:nvPr/>
-        </p:nvSpPr>
-        <p:spPr>
-          <a:xfrm>
-            <a:off x="9209722" y="2520791"/>
-            <a:ext cx="1544645" cy="167640"/>
-          </a:xfrm>
-          <a:prstGeom prst="rect">
-            <a:avLst/>
-          </a:prstGeom>
-          <a:noFill/>
-          <a:ln>
-            <a:noFill/>
-          </a:ln>
-        </p:spPr>
-        <p:txBody>
-          <a:bodyPr wrap="none" lIns="0" tIns="0" rIns="0" bIns="0" anchor="t" anchorCtr="0">
-            <a:spAutoFit/>
-          </a:bodyPr>
-          <a:lstStyle/>
-          <a:p>
-            <a:pPr algn="l"/>
-            <a:r>
-              <a:rPr lang="zh-CN" sz="825" dirty="0">
-                <a:solidFill>
-                  <a:srgbClr val="1A1A1A"/>
-                </a:solidFill>
-                <a:latin typeface="Arial"/>
-                <a:ea typeface="Microsoft YaHei"/>
-                <a:cs typeface="Arial"/>
-              </a:rPr>
-              <a:t>Secure a concrete next step</a:t>
-            </a:r>
-          </a:p>
-        </p:txBody>
-      </p:sp>
-      <p:sp>
-        <p:nvSpPr>
-          <p:cNvPr id="77" name="TextBox 77"/>
-          <p:cNvSpPr txBox="1"/>
-          <p:nvPr/>
-        </p:nvSpPr>
-        <p:spPr>
-          <a:xfrm>
-            <a:off x="9209722" y="2682716"/>
-            <a:ext cx="1220105" cy="167640"/>
-          </a:xfrm>
-          <a:prstGeom prst="rect">
-            <a:avLst/>
-          </a:prstGeom>
-          <a:noFill/>
-          <a:ln>
-            <a:noFill/>
-          </a:ln>
-        </p:spPr>
-        <p:txBody>
-          <a:bodyPr wrap="none" lIns="0" tIns="0" rIns="0" bIns="0" anchor="t" anchorCtr="0">
-            <a:spAutoFit/>
-          </a:bodyPr>
-          <a:lstStyle/>
-          <a:p>
-            <a:pPr algn="l"/>
-            <a:r>
-              <a:rPr lang="zh-CN" sz="825" dirty="0">
-                <a:solidFill>
-                  <a:srgbClr val="1A1A1A"/>
-                </a:solidFill>
-                <a:latin typeface="Arial"/>
-                <a:ea typeface="Microsoft YaHei"/>
-                <a:cs typeface="Arial"/>
-              </a:rPr>
-              <a:t>before leaving the call</a:t>
-            </a:r>
-          </a:p>
-        </p:txBody>
-      </p:sp>
-      <p:sp>
-        <p:nvSpPr>
-          <p:cNvPr id="78" name="TextBox 78"/>
-          <p:cNvSpPr txBox="1"/>
-          <p:nvPr/>
-        </p:nvSpPr>
-        <p:spPr>
-          <a:xfrm>
-            <a:off x="9209722" y="2901791"/>
-            <a:ext cx="1456634" cy="167640"/>
-          </a:xfrm>
-          <a:prstGeom prst="rect">
-            <a:avLst/>
-          </a:prstGeom>
-          <a:noFill/>
-          <a:ln>
-            <a:noFill/>
-          </a:ln>
-        </p:spPr>
-        <p:txBody>
-          <a:bodyPr wrap="none" lIns="0" tIns="0" rIns="0" bIns="0" anchor="t" anchorCtr="0">
-            <a:spAutoFit/>
-          </a:bodyPr>
-          <a:lstStyle/>
-          <a:p>
-            <a:pPr algn="l"/>
-            <a:r>
-              <a:rPr lang="zh-CN" sz="825" dirty="0">
-                <a:solidFill>
-                  <a:srgbClr val="555555"/>
-                </a:solidFill>
-                <a:latin typeface="Arial"/>
-                <a:ea typeface="Microsoft YaHei"/>
-                <a:cs typeface="Arial"/>
-              </a:rPr>
-              <a:t>● "Can we trial Clexane for</a:t>
-            </a:r>
-          </a:p>
-        </p:txBody>
-      </p:sp>
-      <p:sp>
-        <p:nvSpPr>
-          <p:cNvPr id="79" name="TextBox 79"/>
-          <p:cNvSpPr txBox="1"/>
-          <p:nvPr/>
-        </p:nvSpPr>
-        <p:spPr>
-          <a:xfrm>
-            <a:off x="9209722" y="3054191"/>
-            <a:ext cx="1423630" cy="167640"/>
-          </a:xfrm>
-          <a:prstGeom prst="rect">
-            <a:avLst/>
-          </a:prstGeom>
-          <a:noFill/>
-          <a:ln>
-            <a:noFill/>
-          </a:ln>
-        </p:spPr>
-        <p:txBody>
-          <a:bodyPr wrap="none" lIns="0" tIns="0" rIns="0" bIns="0" anchor="t" anchorCtr="0">
-            <a:spAutoFit/>
-          </a:bodyPr>
-          <a:lstStyle/>
-          <a:p>
-            <a:pPr algn="l"/>
-            <a:r>
-              <a:rPr lang="zh-CN" sz="825" dirty="0">
-                <a:solidFill>
-                  <a:srgbClr val="555555"/>
-                </a:solidFill>
-                <a:latin typeface="Arial"/>
-                <a:ea typeface="Microsoft YaHei"/>
-                <a:cs typeface="Arial"/>
-              </a:rPr>
-              <a:t>your next 3 ortho cases?"</a:t>
-            </a:r>
-          </a:p>
-        </p:txBody>
-      </p:sp>
-      <p:sp>
-        <p:nvSpPr>
-          <p:cNvPr id="80" name="TextBox 80"/>
-          <p:cNvSpPr txBox="1"/>
-          <p:nvPr/>
-        </p:nvSpPr>
-        <p:spPr>
-          <a:xfrm>
-            <a:off x="9209722" y="3225641"/>
-            <a:ext cx="1390626" cy="167640"/>
-          </a:xfrm>
-          <a:prstGeom prst="rect">
-            <a:avLst/>
-          </a:prstGeom>
-          <a:noFill/>
-          <a:ln>
-            <a:noFill/>
-          </a:ln>
-        </p:spPr>
-        <p:txBody>
-          <a:bodyPr wrap="none" lIns="0" tIns="0" rIns="0" bIns="0" anchor="t" anchorCtr="0">
-            <a:spAutoFit/>
-          </a:bodyPr>
-          <a:lstStyle/>
-          <a:p>
-            <a:pPr algn="l"/>
-            <a:r>
-              <a:rPr lang="zh-CN" sz="825" dirty="0">
-                <a:solidFill>
-                  <a:srgbClr val="555555"/>
-                </a:solidFill>
-                <a:latin typeface="Arial"/>
-                <a:ea typeface="Microsoft YaHei"/>
-                <a:cs typeface="Arial"/>
-              </a:rPr>
-              <a:t>● Schedule follow-up date</a:t>
-            </a:r>
-          </a:p>
-        </p:txBody>
-      </p:sp>
-      <p:sp>
-        <p:nvSpPr>
-          <p:cNvPr id="81" name="TextBox 81"/>
-          <p:cNvSpPr txBox="1"/>
-          <p:nvPr/>
-        </p:nvSpPr>
-        <p:spPr>
-          <a:xfrm>
-            <a:off x="9209722" y="3397091"/>
-            <a:ext cx="1495139" cy="167640"/>
-          </a:xfrm>
-          <a:prstGeom prst="rect">
-            <a:avLst/>
-          </a:prstGeom>
-          <a:noFill/>
-          <a:ln>
-            <a:noFill/>
-          </a:ln>
-        </p:spPr>
-        <p:txBody>
-          <a:bodyPr wrap="none" lIns="0" tIns="0" rIns="0" bIns="0" anchor="t" anchorCtr="0">
-            <a:spAutoFit/>
-          </a:bodyPr>
-          <a:lstStyle/>
-          <a:p>
-            <a:pPr algn="l"/>
-            <a:r>
-              <a:rPr lang="zh-CN" sz="825" dirty="0">
-                <a:solidFill>
-                  <a:srgbClr val="555555"/>
-                </a:solidFill>
-                <a:latin typeface="Arial"/>
-                <a:ea typeface="Microsoft YaHei"/>
-                <a:cs typeface="Arial"/>
-              </a:rPr>
-              <a:t>● Leave a clinical reference</a:t>
-            </a:r>
-          </a:p>
-        </p:txBody>
-      </p:sp>
-      <p:sp>
-        <p:nvSpPr>
-          <p:cNvPr id="82" name="TextBox 82"/>
-          <p:cNvSpPr txBox="1"/>
-          <p:nvPr/>
-        </p:nvSpPr>
-        <p:spPr>
-          <a:xfrm>
-            <a:off x="9210675" y="3729038"/>
-            <a:ext cx="1259205" cy="152400"/>
-          </a:xfrm>
-          <a:prstGeom prst="rect">
-            <a:avLst/>
-          </a:prstGeom>
-          <a:noFill/>
-          <a:ln>
-            <a:noFill/>
-          </a:ln>
-        </p:spPr>
-        <p:txBody>
-          <a:bodyPr wrap="none" lIns="0" tIns="0" rIns="0" bIns="0" anchor="t" anchorCtr="0">
-            <a:spAutoFit/>
-          </a:bodyPr>
-          <a:lstStyle/>
-          <a:p>
-            <a:pPr algn="l"/>
-            <a:r>
-              <a:rPr lang="zh-CN" sz="750" i="1" dirty="0">
-                <a:solidFill>
-                  <a:srgbClr val="888888"/>
-                </a:solidFill>
-                <a:latin typeface="Arial"/>
-                <a:ea typeface="Microsoft YaHei"/>
-                <a:cs typeface="Arial"/>
-              </a:rPr>
-              <a:t>"Always leave with a yes"</a:t>
-            </a:r>
-          </a:p>
-        </p:txBody>
-      </p:sp>
-      <p:sp>
-        <p:nvSpPr>
-          <p:cNvPr id="83" name="Rectangle 83"/>
-          <p:cNvSpPr/>
-          <p:nvPr/>
-        </p:nvSpPr>
-        <p:spPr>
-          <a:xfrm>
-            <a:off x="381000" y="4152900"/>
-            <a:ext cx="11430000" cy="819150"/>
-          </a:xfrm>
-          <a:prstGeom prst="roundRect">
-            <a:avLst>
-              <a:gd name="adj" fmla="val 9302"/>
-            </a:avLst>
-          </a:prstGeom>
-          <a:solidFill>
-            <a:srgbClr val="AE232F"/>
-          </a:solidFill>
-          <a:ln>
-            <a:noFill/>
-          </a:ln>
-          <a:effectLst>
-            <a:outerShdw blurRad="76200" dist="19050" dir="5400000" algn="ctr" rotWithShape="0">
-              <a:srgbClr val="000000">
-                <a:alpha val="5250"/>
-              </a:srgbClr>
-            </a:outerShdw>
-          </a:effectLst>
-        </p:spPr>
-      </p:sp>
-      <p:sp>
-        <p:nvSpPr>
-          <p:cNvPr id="84" name="Rectangle 84"/>
-          <p:cNvSpPr/>
-          <p:nvPr/>
-        </p:nvSpPr>
-        <p:spPr>
-          <a:xfrm>
-            <a:off x="381000" y="4152900"/>
-            <a:ext cx="57150" cy="819150"/>
-          </a:xfrm>
-          <a:prstGeom prst="roundRect">
-            <a:avLst>
-              <a:gd name="adj" fmla="val 50000"/>
-            </a:avLst>
-          </a:prstGeom>
-          <a:solidFill>
-            <a:srgbClr val="8A1B25"/>
-          </a:solidFill>
-          <a:ln>
-            <a:noFill/>
-          </a:ln>
-        </p:spPr>
-      </p:sp>
-      <p:sp>
-        <p:nvSpPr>
-          <p:cNvPr id="85" name="TextBox 85"/>
-          <p:cNvSpPr txBox="1"/>
-          <p:nvPr/>
-        </p:nvSpPr>
-        <p:spPr>
-          <a:xfrm>
-            <a:off x="634365" y="4287202"/>
-            <a:ext cx="2900879" cy="213360"/>
-          </a:xfrm>
-          <a:prstGeom prst="rect">
-            <a:avLst/>
-          </a:prstGeom>
-          <a:noFill/>
-          <a:ln>
-            <a:noFill/>
-          </a:ln>
-        </p:spPr>
-        <p:txBody>
-          <a:bodyPr wrap="none" lIns="0" tIns="0" rIns="0" bIns="0" anchor="t" anchorCtr="0">
-            <a:spAutoFit/>
-          </a:bodyPr>
-          <a:lstStyle/>
-          <a:p>
-            <a:pPr algn="l"/>
-            <a:r>
-              <a:rPr lang="zh-CN" sz="1050" b="1" dirty="0">
-                <a:solidFill>
-                  <a:srgbClr val="FFFFFF"/>
-                </a:solidFill>
-                <a:latin typeface="Arial"/>
-                <a:ea typeface="Microsoft YaHei"/>
-                <a:cs typeface="Arial"/>
-              </a:rPr>
-              <a:t>Core Principle: Physician-First Detailing</a:t>
-            </a:r>
-          </a:p>
-        </p:txBody>
-      </p:sp>
-      <p:sp>
-        <p:nvSpPr>
-          <p:cNvPr id="86" name="TextBox 86"/>
-          <p:cNvSpPr txBox="1"/>
-          <p:nvPr/>
-        </p:nvSpPr>
-        <p:spPr>
-          <a:xfrm>
-            <a:off x="635318" y="4514374"/>
-            <a:ext cx="7611213" cy="198120"/>
-          </a:xfrm>
-          <a:prstGeom prst="rect">
-            <a:avLst/>
-          </a:prstGeom>
-          <a:noFill/>
-          <a:ln>
-            <a:noFill/>
-          </a:ln>
-        </p:spPr>
-        <p:txBody>
-          <a:bodyPr wrap="none" lIns="0" tIns="0" rIns="0" bIns="0" anchor="t" anchorCtr="0">
-            <a:spAutoFit/>
-          </a:bodyPr>
-          <a:lstStyle/>
-          <a:p>
-            <a:pPr algn="l"/>
-            <a:r>
-              <a:rPr lang="zh-CN" sz="975" dirty="0">
+              <a:rPr lang="zh-CN" sz="900" dirty="0">
                 <a:solidFill>
                   <a:srgbClr val="F9E5E7"/>
                 </a:solidFill>
@@ -27886,382 +27028,14 @@
                 <a:ea typeface="Microsoft YaHei"/>
                 <a:cs typeface="Arial"/>
               </a:rPr>
-              <a:t>Every ADAPT call starts with the physician's clinical reality — not with my product's features. I use Clexane's evidence</a:t>
-            </a:r>
-          </a:p>
-        </p:txBody>
-      </p:sp>
-      <p:sp>
-        <p:nvSpPr>
-          <p:cNvPr id="87" name="TextBox 87"/>
-          <p:cNvSpPr txBox="1"/>
-          <p:nvPr/>
-        </p:nvSpPr>
-        <p:spPr>
-          <a:xfrm>
-            <a:off x="635318" y="4685824"/>
-            <a:ext cx="7708725" cy="198120"/>
-          </a:xfrm>
-          <a:prstGeom prst="rect">
-            <a:avLst/>
-          </a:prstGeom>
-          <a:noFill/>
-          <a:ln>
-            <a:noFill/>
-          </a:ln>
-        </p:spPr>
-        <p:txBody>
-          <a:bodyPr wrap="none" lIns="0" tIns="0" rIns="0" bIns="0" anchor="t" anchorCtr="0">
-            <a:spAutoFit/>
-          </a:bodyPr>
-          <a:lstStyle/>
-          <a:p>
-            <a:pPr algn="l"/>
-            <a:r>
-              <a:rPr lang="zh-CN" sz="975" dirty="0">
-                <a:solidFill>
-                  <a:srgbClr val="F9E5E7"/>
-                </a:solidFill>
-                <a:latin typeface="Arial"/>
-                <a:ea typeface="Microsoft YaHei"/>
-                <a:cs typeface="Arial"/>
-              </a:rPr>
-              <a:t>to solve a problem the physician already has. This approach was validated during my Roche internship: physicians respond</a:t>
-            </a:r>
-          </a:p>
-        </p:txBody>
-      </p:sp>
-      <p:sp>
-        <p:nvSpPr>
-          <p:cNvPr id="88" name="TextBox 88"/>
-          <p:cNvSpPr txBox="1"/>
-          <p:nvPr/>
-        </p:nvSpPr>
-        <p:spPr>
-          <a:xfrm>
-            <a:off x="635318" y="4857274"/>
-            <a:ext cx="2729103" cy="198120"/>
-          </a:xfrm>
-          <a:prstGeom prst="rect">
-            <a:avLst/>
-          </a:prstGeom>
-          <a:noFill/>
-          <a:ln>
-            <a:noFill/>
-          </a:ln>
-        </p:spPr>
-        <p:txBody>
-          <a:bodyPr wrap="none" lIns="0" tIns="0" rIns="0" bIns="0" anchor="t" anchorCtr="0">
-            <a:spAutoFit/>
-          </a:bodyPr>
-          <a:lstStyle/>
-          <a:p>
-            <a:pPr algn="l"/>
-            <a:r>
-              <a:rPr lang="zh-CN" sz="975" dirty="0">
-                <a:solidFill>
-                  <a:srgbClr val="F9E5E7"/>
-                </a:solidFill>
-                <a:latin typeface="Arial"/>
-                <a:ea typeface="Microsoft YaHei"/>
-                <a:cs typeface="Arial"/>
-              </a:rPr>
-              <a:t>to insight and empathy, not feature lists.</a:t>
-            </a:r>
-          </a:p>
-        </p:txBody>
-      </p:sp>
-      <p:sp>
-        <p:nvSpPr>
-          <p:cNvPr id="89" name="Rectangle 89"/>
-          <p:cNvSpPr/>
-          <p:nvPr/>
-        </p:nvSpPr>
-        <p:spPr>
-          <a:xfrm>
-            <a:off x="381000" y="5143500"/>
-            <a:ext cx="11430000" cy="1009650"/>
-          </a:xfrm>
-          <a:prstGeom prst="roundRect">
-            <a:avLst>
-              <a:gd name="adj" fmla="val 7547"/>
-            </a:avLst>
-          </a:prstGeom>
-          <a:solidFill>
-            <a:srgbClr val="F5F5F5"/>
-          </a:solidFill>
-          <a:ln>
-            <a:noFill/>
-          </a:ln>
-        </p:spPr>
-      </p:sp>
-      <p:sp>
-        <p:nvSpPr>
-          <p:cNvPr id="90" name="Rectangle 90"/>
-          <p:cNvSpPr/>
-          <p:nvPr/>
-        </p:nvSpPr>
-        <p:spPr>
-          <a:xfrm>
-            <a:off x="381000" y="5143500"/>
-            <a:ext cx="38100" cy="1009650"/>
-          </a:xfrm>
-          <a:prstGeom prst="roundRect">
-            <a:avLst>
-              <a:gd name="adj" fmla="val 50000"/>
-            </a:avLst>
-          </a:prstGeom>
-          <a:solidFill>
-            <a:srgbClr val="AE232F"/>
-          </a:solidFill>
-          <a:ln>
-            <a:noFill/>
-          </a:ln>
-        </p:spPr>
-      </p:sp>
-      <p:sp>
-        <p:nvSpPr>
-          <p:cNvPr id="91" name="TextBox 91"/>
-          <p:cNvSpPr txBox="1"/>
-          <p:nvPr/>
-        </p:nvSpPr>
-        <p:spPr>
-          <a:xfrm>
-            <a:off x="540068" y="5247799"/>
-            <a:ext cx="4366008" cy="198120"/>
-          </a:xfrm>
-          <a:prstGeom prst="rect">
-            <a:avLst/>
-          </a:prstGeom>
-          <a:noFill/>
-          <a:ln>
-            <a:noFill/>
-          </a:ln>
-        </p:spPr>
-        <p:txBody>
-          <a:bodyPr wrap="none" lIns="0" tIns="0" rIns="0" bIns="0" anchor="t" anchorCtr="0">
-            <a:spAutoFit/>
-          </a:bodyPr>
-          <a:lstStyle/>
-          <a:p>
-            <a:pPr algn="l"/>
-            <a:r>
-              <a:rPr lang="zh-CN" sz="975" b="1" dirty="0">
-                <a:solidFill>
-                  <a:srgbClr val="AE232F"/>
-                </a:solidFill>
-                <a:latin typeface="Arial"/>
-                <a:ea typeface="Microsoft YaHei"/>
-                <a:cs typeface="Arial"/>
-              </a:rPr>
-              <a:t>Real Example from Roche Internship (Adapted to Clexane Context)</a:t>
-            </a:r>
-          </a:p>
-        </p:txBody>
-      </p:sp>
-      <p:sp>
-        <p:nvSpPr>
-          <p:cNvPr id="92" name="TextBox 92"/>
-          <p:cNvSpPr txBox="1"/>
-          <p:nvPr/>
-        </p:nvSpPr>
-        <p:spPr>
-          <a:xfrm>
-            <a:off x="541020" y="5446395"/>
-            <a:ext cx="8297894" cy="182880"/>
-          </a:xfrm>
-          <a:prstGeom prst="rect">
-            <a:avLst/>
-          </a:prstGeom>
-          <a:noFill/>
-          <a:ln>
-            <a:noFill/>
-          </a:ln>
-        </p:spPr>
-        <p:txBody>
-          <a:bodyPr wrap="none" lIns="0" tIns="0" rIns="0" bIns="0" anchor="t" anchorCtr="0">
-            <a:spAutoFit/>
-          </a:bodyPr>
-          <a:lstStyle/>
-          <a:p>
-            <a:pPr algn="l"/>
-            <a:r>
-              <a:rPr lang="zh-CN" sz="900" dirty="0">
-                <a:solidFill>
-                  <a:srgbClr val="555555"/>
-                </a:solidFill>
-                <a:latin typeface="Arial"/>
-                <a:ea typeface="Microsoft YaHei"/>
-                <a:cs typeface="Arial"/>
-              </a:rPr>
-              <a:t>A — Reviewed cardiologist at Bhumibol: high ACS volume, preferred UFH for cost. D — Asked: "Any monitoring burden concerns with UFH drips?"</a:t>
-            </a:r>
-          </a:p>
-        </p:txBody>
-      </p:sp>
-      <p:sp>
-        <p:nvSpPr>
-          <p:cNvPr id="93" name="TextBox 93"/>
-          <p:cNvSpPr txBox="1"/>
-          <p:nvPr/>
-        </p:nvSpPr>
-        <p:spPr>
-          <a:xfrm>
-            <a:off x="541020" y="5617845"/>
-            <a:ext cx="7931849" cy="182880"/>
-          </a:xfrm>
-          <a:prstGeom prst="rect">
-            <a:avLst/>
-          </a:prstGeom>
-          <a:noFill/>
-          <a:ln>
-            <a:noFill/>
-          </a:ln>
-        </p:spPr>
-        <p:txBody>
-          <a:bodyPr wrap="none" lIns="0" tIns="0" rIns="0" bIns="0" anchor="t" anchorCtr="0">
-            <a:spAutoFit/>
-          </a:bodyPr>
-          <a:lstStyle/>
-          <a:p>
-            <a:pPr algn="l"/>
-            <a:r>
-              <a:rPr lang="zh-CN" sz="900" dirty="0">
-                <a:solidFill>
-                  <a:srgbClr val="555555"/>
-                </a:solidFill>
-                <a:latin typeface="Arial"/>
-                <a:ea typeface="Microsoft YaHei"/>
-                <a:cs typeface="Arial"/>
-              </a:rPr>
-              <a:t>A — Presented ESSENCE data: Clexane reduced recurrent ischemia 20% vs UFH. P — "Your team saves 2 aPTT checks per patient per day."</a:t>
-            </a:r>
-          </a:p>
-        </p:txBody>
-      </p:sp>
-      <p:sp>
-        <p:nvSpPr>
-          <p:cNvPr id="94" name="TextBox 94"/>
-          <p:cNvSpPr txBox="1"/>
-          <p:nvPr/>
-        </p:nvSpPr>
-        <p:spPr>
-          <a:xfrm>
-            <a:off x="541020" y="5789295"/>
-            <a:ext cx="6953726" cy="182880"/>
-          </a:xfrm>
-          <a:prstGeom prst="rect">
-            <a:avLst/>
-          </a:prstGeom>
-          <a:noFill/>
-          <a:ln>
-            <a:noFill/>
-          </a:ln>
-        </p:spPr>
-        <p:txBody>
-          <a:bodyPr wrap="none" lIns="0" tIns="0" rIns="0" bIns="0" anchor="t" anchorCtr="0">
-            <a:spAutoFit/>
-          </a:bodyPr>
-          <a:lstStyle/>
-          <a:p>
-            <a:pPr algn="l"/>
-            <a:r>
-              <a:rPr lang="zh-CN" sz="900" dirty="0">
-                <a:solidFill>
-                  <a:srgbClr val="555555"/>
-                </a:solidFill>
-                <a:latin typeface="Arial"/>
-                <a:ea typeface="Microsoft YaHei"/>
-                <a:cs typeface="Arial"/>
-              </a:rPr>
-              <a:t>T — "Would you try Clexane on your next 5 UA patients and compare workload?" — Physician agreed to a pilot evaluation.</a:t>
-            </a:r>
-          </a:p>
-        </p:txBody>
-      </p:sp>
-      <p:sp>
-        <p:nvSpPr>
-          <p:cNvPr id="95" name="TextBox 95"/>
-          <p:cNvSpPr txBox="1"/>
-          <p:nvPr/>
-        </p:nvSpPr>
-        <p:spPr>
-          <a:xfrm>
-            <a:off x="541020" y="5960745"/>
-            <a:ext cx="454914" cy="182880"/>
-          </a:xfrm>
-          <a:prstGeom prst="rect">
-            <a:avLst/>
-          </a:prstGeom>
-          <a:noFill/>
-          <a:ln>
-            <a:noFill/>
-          </a:ln>
-        </p:spPr>
-        <p:txBody>
-          <a:bodyPr wrap="none" lIns="0" tIns="0" rIns="0" bIns="0" anchor="t" anchorCtr="0">
-            <a:spAutoFit/>
-          </a:bodyPr>
-          <a:lstStyle/>
-          <a:p>
-            <a:pPr algn="l"/>
-            <a:r>
-              <a:rPr lang="zh-CN" sz="900" dirty="0">
-                <a:solidFill>
-                  <a:srgbClr val="1A1A1A"/>
-                </a:solidFill>
-                <a:latin typeface="Arial"/>
-                <a:ea typeface="Microsoft YaHei"/>
-                <a:cs typeface="Arial"/>
-              </a:rPr>
-              <a:t>Result:</a:t>
-            </a:r>
-          </a:p>
-        </p:txBody>
-      </p:sp>
-      <p:sp>
-        <p:nvSpPr>
-          <p:cNvPr id="96" name="TextBox 96"/>
-          <p:cNvSpPr txBox="1"/>
-          <p:nvPr/>
-        </p:nvSpPr>
-        <p:spPr>
-          <a:xfrm>
-            <a:off x="1017270" y="5960745"/>
-            <a:ext cx="3242562" cy="182880"/>
-          </a:xfrm>
-          <a:prstGeom prst="rect">
-            <a:avLst/>
-          </a:prstGeom>
-          <a:noFill/>
-          <a:ln>
-            <a:noFill/>
-          </a:ln>
-        </p:spPr>
-        <p:txBody>
-          <a:bodyPr wrap="none" lIns="0" tIns="0" rIns="0" bIns="0" anchor="t" anchorCtr="0">
-            <a:spAutoFit/>
-          </a:bodyPr>
-          <a:lstStyle/>
-          <a:p>
-            <a:pPr algn="l"/>
-            <a:r>
-              <a:rPr lang="zh-CN" sz="900" b="1" dirty="0">
-                <a:solidFill>
-                  <a:srgbClr val="AE232F"/>
-                </a:solidFill>
-                <a:latin typeface="Arial"/>
-                <a:ea typeface="Microsoft YaHei"/>
-                <a:cs typeface="Arial"/>
-              </a:rPr>
-              <a:t>Pilot agreed in one call — ADAPT framework in action.</a:t>
+              <a:t>Probing and Presentation are not linear — they cycle until the physician's need is fully addressed and all objections are resolved.</a:t>
             </a:r>
           </a:p>
         </p:txBody>
       </p:sp>
       <p:grpSp>
         <p:nvGrpSpPr>
-          <p:cNvPr id="99" name="Group 99"/>
+          <p:cNvPr id="74" name="Group 74"/>
           <p:cNvGrpSpPr/>
           <p:nvPr/>
         </p:nvGrpSpPr>
@@ -28275,7 +27049,7 @@
         </p:grpSpPr>
         <p:sp>
           <p:nvSpPr>
-            <p:cNvPr id="97" name="Rectangle 97"/>
+            <p:cNvPr id="72" name="Rectangle 72"/>
             <p:cNvSpPr/>
             <p:nvPr/>
           </p:nvSpPr>
@@ -28297,7 +27071,7 @@
         </p:sp>
         <p:sp>
           <p:nvSpPr>
-            <p:cNvPr id="98" name="TextBox 98"/>
+            <p:cNvPr id="73" name="TextBox 73"/>
             <p:cNvSpPr txBox="1"/>
             <p:nvPr/>
           </p:nvSpPr>
